--- a/Presentations/FederatedLearning.pptx
+++ b/Presentations/FederatedLearning.pptx
@@ -5,7 +5,7 @@
     <p:sldMasterId id="2147483648" r:id="rId1"/>
   </p:sldMasterIdLst>
   <p:notesMasterIdLst>
-    <p:notesMasterId r:id="rId14"/>
+    <p:notesMasterId r:id="rId16"/>
   </p:notesMasterIdLst>
   <p:sldIdLst>
     <p:sldId id="256" r:id="rId2"/>
@@ -15,11 +15,13 @@
     <p:sldId id="279" r:id="rId6"/>
     <p:sldId id="280" r:id="rId7"/>
     <p:sldId id="281" r:id="rId8"/>
-    <p:sldId id="277" r:id="rId9"/>
-    <p:sldId id="276" r:id="rId10"/>
-    <p:sldId id="274" r:id="rId11"/>
-    <p:sldId id="275" r:id="rId12"/>
-    <p:sldId id="269" r:id="rId13"/>
+    <p:sldId id="282" r:id="rId9"/>
+    <p:sldId id="283" r:id="rId10"/>
+    <p:sldId id="276" r:id="rId11"/>
+    <p:sldId id="284" r:id="rId12"/>
+    <p:sldId id="274" r:id="rId13"/>
+    <p:sldId id="275" r:id="rId14"/>
+    <p:sldId id="269" r:id="rId15"/>
   </p:sldIdLst>
   <p:sldSz cx="9144000" cy="6858000" type="screen4x3"/>
   <p:notesSz cx="6858000" cy="9144000"/>
@@ -3507,7 +3509,76 @@
       </p:grpSpPr>
       <p:sp>
         <p:nvSpPr>
-          <p:cNvPr id="2" name="Title 1"/>
+          <p:cNvPr id="7" name="Text Box 10"/>
+          <p:cNvSpPr txBox="1">
+            <a:spLocks noChangeArrowheads="1"/>
+          </p:cNvSpPr>
+          <p:nvPr/>
+        </p:nvSpPr>
+        <p:spPr bwMode="auto">
+          <a:xfrm rot="10800000" flipV="1">
+            <a:off x="0" y="6519446"/>
+            <a:ext cx="1828800" cy="338554"/>
+          </a:xfrm>
+          <a:prstGeom prst="rect">
+            <a:avLst/>
+          </a:prstGeom>
+          <a:noFill/>
+          <a:ln w="9525">
+            <a:noFill/>
+            <a:miter lim="800000"/>
+            <a:headEnd/>
+            <a:tailEnd/>
+          </a:ln>
+          <a:effectLst/>
+        </p:spPr>
+        <p:txBody>
+          <a:bodyPr wrap="square">
+            <a:spAutoFit/>
+          </a:bodyPr>
+          <a:lstStyle/>
+          <a:p>
+            <a:pPr>
+              <a:spcBef>
+                <a:spcPct val="50000"/>
+              </a:spcBef>
+            </a:pPr>
+            <a:r>
+              <a:rPr lang="en-US" sz="1600" b="1" dirty="0">
+                <a:solidFill>
+                  <a:srgbClr val="FF0000"/>
+                </a:solidFill>
+              </a:rPr>
+              <a:t>Image </a:t>
+            </a:r>
+            <a:r>
+              <a:rPr lang="en-US" sz="1600" b="1" dirty="0" err="1">
+                <a:solidFill>
+                  <a:srgbClr val="FF0000"/>
+                </a:solidFill>
+              </a:rPr>
+              <a:t>ack</a:t>
+            </a:r>
+            <a:r>
+              <a:rPr lang="en-US" sz="1600" b="1" dirty="0">
+                <a:solidFill>
+                  <a:srgbClr val="FF0000"/>
+                </a:solidFill>
+              </a:rPr>
+              <a:t> – Google</a:t>
+            </a:r>
+          </a:p>
+        </p:txBody>
+      </p:sp>
+      <p:sp>
+        <p:nvSpPr>
+          <p:cNvPr id="5" name="Title 1">
+            <a:extLst>
+              <a:ext uri="{FF2B5EF4-FFF2-40B4-BE49-F238E27FC236}">
+                <a16:creationId xmlns:a16="http://schemas.microsoft.com/office/drawing/2014/main" id="{10AC75BB-CF7F-F667-BD1E-4CC17BF98DFA}"/>
+              </a:ext>
+            </a:extLst>
+          </p:cNvPr>
           <p:cNvSpPr>
             <a:spLocks noGrp="1"/>
           </p:cNvSpPr>
@@ -3515,56 +3586,61 @@
             <p:ph type="title"/>
           </p:nvPr>
         </p:nvSpPr>
-        <p:spPr/>
-        <p:txBody>
-          <a:bodyPr/>
+        <p:spPr>
+          <a:xfrm>
+            <a:off x="457200" y="274638"/>
+            <a:ext cx="8229600" cy="1143000"/>
+          </a:xfrm>
+        </p:spPr>
+        <p:txBody>
+          <a:bodyPr>
+            <a:normAutofit/>
+          </a:bodyPr>
           <a:lstStyle/>
           <a:p>
             <a:r>
               <a:rPr lang="en-US" dirty="0"/>
-              <a:t>Advantages</a:t>
-            </a:r>
-          </a:p>
-        </p:txBody>
-      </p:sp>
-      <p:sp>
-        <p:nvSpPr>
-          <p:cNvPr id="4" name="Content Placeholder 3"/>
-          <p:cNvSpPr>
-            <a:spLocks noGrp="1"/>
-          </p:cNvSpPr>
-          <p:nvPr>
-            <p:ph idx="1"/>
-          </p:nvPr>
-        </p:nvSpPr>
-        <p:spPr/>
-        <p:txBody>
-          <a:bodyPr/>
-          <a:lstStyle/>
-          <a:p>
-            <a:r>
-              <a:rPr lang="en-IN" dirty="0"/>
-              <a:t>Less over-fitting by using multiple trees</a:t>
-            </a:r>
-          </a:p>
-          <a:p>
-            <a:r>
-              <a:rPr lang="en-IN" dirty="0"/>
-              <a:t>More accurate as compared to single tree</a:t>
-            </a:r>
-            <a:endParaRPr lang="en-US" dirty="0"/>
-          </a:p>
-          <a:p>
-            <a:endParaRPr lang="en-US" dirty="0"/>
-          </a:p>
-          <a:p>
-            <a:endParaRPr lang="en-US" dirty="0"/>
-          </a:p>
-          <a:p>
-            <a:endParaRPr lang="en-US" dirty="0"/>
-          </a:p>
-        </p:txBody>
-      </p:sp>
+              <a:t>How Federated Learning Works?</a:t>
+            </a:r>
+          </a:p>
+        </p:txBody>
+      </p:sp>
+      <p:pic>
+        <p:nvPicPr>
+          <p:cNvPr id="9" name="Picture 8">
+            <a:extLst>
+              <a:ext uri="{FF2B5EF4-FFF2-40B4-BE49-F238E27FC236}">
+                <a16:creationId xmlns:a16="http://schemas.microsoft.com/office/drawing/2014/main" id="{9DAC0114-7596-7D44-400E-94C6D70B7094}"/>
+              </a:ext>
+            </a:extLst>
+          </p:cNvPr>
+          <p:cNvPicPr>
+            <a:picLocks noChangeAspect="1"/>
+          </p:cNvPicPr>
+          <p:nvPr/>
+        </p:nvPicPr>
+        <p:blipFill>
+          <a:blip r:embed="rId2">
+            <a:extLst>
+              <a:ext uri="{28A0092B-C50C-407E-A947-70E740481C1C}">
+                <a14:useLocalDpi xmlns:a14="http://schemas.microsoft.com/office/drawing/2010/main" val="0"/>
+              </a:ext>
+            </a:extLst>
+          </a:blip>
+          <a:stretch>
+            <a:fillRect/>
+          </a:stretch>
+        </p:blipFill>
+        <p:spPr>
+          <a:xfrm>
+            <a:off x="838200" y="1530370"/>
+            <a:ext cx="7467600" cy="4876343"/>
+          </a:xfrm>
+          <a:prstGeom prst="rect">
+            <a:avLst/>
+          </a:prstGeom>
+        </p:spPr>
+      </p:pic>
     </p:spTree>
   </p:cSld>
   <p:clrMapOvr>
@@ -3602,12 +3678,14 @@
         </p:nvSpPr>
         <p:spPr/>
         <p:txBody>
-          <a:bodyPr/>
+          <a:bodyPr>
+            <a:normAutofit/>
+          </a:bodyPr>
           <a:lstStyle/>
           <a:p>
             <a:r>
               <a:rPr lang="en-US" dirty="0"/>
-              <a:t>Disadvantages</a:t>
+              <a:t>Federated Learning – Key Idea</a:t>
             </a:r>
           </a:p>
         </p:txBody>
@@ -3629,14 +3707,112 @@
           <a:p>
             <a:r>
               <a:rPr lang="en-US" dirty="0"/>
-              <a:t>Computationally expensive</a:t>
-            </a:r>
-          </a:p>
+              <a:t>Data remains on local devices</a:t>
+            </a:r>
+          </a:p>
+          <a:p>
+            <a:r>
+              <a:rPr lang="en-US" dirty="0"/>
+              <a:t>Only model updates are shared</a:t>
+            </a:r>
+          </a:p>
+          <a:p>
+            <a:r>
+              <a:rPr lang="en-US" dirty="0"/>
+              <a:t>Enables collaborative learning without compromising data privacy</a:t>
+            </a:r>
+          </a:p>
+          <a:p>
+            <a:endParaRPr lang="en-US" dirty="0"/>
+          </a:p>
+        </p:txBody>
+      </p:sp>
+    </p:spTree>
+    <p:extLst>
+      <p:ext uri="{BB962C8B-B14F-4D97-AF65-F5344CB8AC3E}">
+        <p14:creationId xmlns:p14="http://schemas.microsoft.com/office/powerpoint/2010/main" val="1673267838"/>
+      </p:ext>
+    </p:extLst>
+  </p:cSld>
+  <p:clrMapOvr>
+    <a:masterClrMapping/>
+  </p:clrMapOvr>
+</p:sld>
+</file>
+
+<file path=ppt/slides/slide12.xml><?xml version="1.0" encoding="utf-8"?>
+<p:sld xmlns:a="http://schemas.openxmlformats.org/drawingml/2006/main" xmlns:r="http://schemas.openxmlformats.org/officeDocument/2006/relationships" xmlns:p="http://schemas.openxmlformats.org/presentationml/2006/main">
+  <p:cSld>
+    <p:spTree>
+      <p:nvGrpSpPr>
+        <p:cNvPr id="1" name=""/>
+        <p:cNvGrpSpPr/>
+        <p:nvPr/>
+      </p:nvGrpSpPr>
+      <p:grpSpPr>
+        <a:xfrm>
+          <a:off x="0" y="0"/>
+          <a:ext cx="0" cy="0"/>
+          <a:chOff x="0" y="0"/>
+          <a:chExt cx="0" cy="0"/>
+        </a:xfrm>
+      </p:grpSpPr>
+      <p:sp>
+        <p:nvSpPr>
+          <p:cNvPr id="2" name="Title 1"/>
+          <p:cNvSpPr>
+            <a:spLocks noGrp="1"/>
+          </p:cNvSpPr>
+          <p:nvPr>
+            <p:ph type="title"/>
+          </p:nvPr>
+        </p:nvSpPr>
+        <p:spPr/>
+        <p:txBody>
+          <a:bodyPr/>
+          <a:lstStyle/>
+          <a:p>
+            <a:r>
+              <a:rPr lang="en-US" dirty="0"/>
+              <a:t>Advantages</a:t>
+            </a:r>
+          </a:p>
+        </p:txBody>
+      </p:sp>
+      <p:sp>
+        <p:nvSpPr>
+          <p:cNvPr id="4" name="Content Placeholder 3"/>
+          <p:cNvSpPr>
+            <a:spLocks noGrp="1"/>
+          </p:cNvSpPr>
+          <p:nvPr>
+            <p:ph idx="1"/>
+          </p:nvPr>
+        </p:nvSpPr>
+        <p:spPr/>
+        <p:txBody>
+          <a:bodyPr/>
+          <a:lstStyle/>
           <a:p>
             <a:r>
               <a:rPr lang="en-IN" dirty="0"/>
-              <a:t>Less interpretable than decision tree</a:t>
-            </a:r>
+              <a:t>Less over-fitting by using multiple trees</a:t>
+            </a:r>
+          </a:p>
+          <a:p>
+            <a:r>
+              <a:rPr lang="en-IN" dirty="0"/>
+              <a:t>More accurate as compared to single tree</a:t>
+            </a:r>
+            <a:endParaRPr lang="en-US" dirty="0"/>
+          </a:p>
+          <a:p>
+            <a:endParaRPr lang="en-US" dirty="0"/>
+          </a:p>
+          <a:p>
+            <a:endParaRPr lang="en-US" dirty="0"/>
+          </a:p>
+          <a:p>
             <a:endParaRPr lang="en-US" dirty="0"/>
           </a:p>
         </p:txBody>
@@ -3649,7 +3825,83 @@
 </p:sld>
 </file>
 
-<file path=ppt/slides/slide12.xml><?xml version="1.0" encoding="utf-8"?>
+<file path=ppt/slides/slide13.xml><?xml version="1.0" encoding="utf-8"?>
+<p:sld xmlns:a="http://schemas.openxmlformats.org/drawingml/2006/main" xmlns:r="http://schemas.openxmlformats.org/officeDocument/2006/relationships" xmlns:p="http://schemas.openxmlformats.org/presentationml/2006/main">
+  <p:cSld>
+    <p:spTree>
+      <p:nvGrpSpPr>
+        <p:cNvPr id="1" name=""/>
+        <p:cNvGrpSpPr/>
+        <p:nvPr/>
+      </p:nvGrpSpPr>
+      <p:grpSpPr>
+        <a:xfrm>
+          <a:off x="0" y="0"/>
+          <a:ext cx="0" cy="0"/>
+          <a:chOff x="0" y="0"/>
+          <a:chExt cx="0" cy="0"/>
+        </a:xfrm>
+      </p:grpSpPr>
+      <p:sp>
+        <p:nvSpPr>
+          <p:cNvPr id="2" name="Title 1"/>
+          <p:cNvSpPr>
+            <a:spLocks noGrp="1"/>
+          </p:cNvSpPr>
+          <p:nvPr>
+            <p:ph type="title"/>
+          </p:nvPr>
+        </p:nvSpPr>
+        <p:spPr/>
+        <p:txBody>
+          <a:bodyPr/>
+          <a:lstStyle/>
+          <a:p>
+            <a:r>
+              <a:rPr lang="en-US" dirty="0"/>
+              <a:t>Disadvantages</a:t>
+            </a:r>
+          </a:p>
+        </p:txBody>
+      </p:sp>
+      <p:sp>
+        <p:nvSpPr>
+          <p:cNvPr id="4" name="Content Placeholder 3"/>
+          <p:cNvSpPr>
+            <a:spLocks noGrp="1"/>
+          </p:cNvSpPr>
+          <p:nvPr>
+            <p:ph idx="1"/>
+          </p:nvPr>
+        </p:nvSpPr>
+        <p:spPr/>
+        <p:txBody>
+          <a:bodyPr/>
+          <a:lstStyle/>
+          <a:p>
+            <a:r>
+              <a:rPr lang="en-US" dirty="0"/>
+              <a:t>Computationally expensive</a:t>
+            </a:r>
+          </a:p>
+          <a:p>
+            <a:r>
+              <a:rPr lang="en-IN" dirty="0"/>
+              <a:t>Less interpretable than decision tree</a:t>
+            </a:r>
+            <a:endParaRPr lang="en-US" dirty="0"/>
+          </a:p>
+        </p:txBody>
+      </p:sp>
+    </p:spTree>
+  </p:cSld>
+  <p:clrMapOvr>
+    <a:masterClrMapping/>
+  </p:clrMapOvr>
+</p:sld>
+</file>
+
+<file path=ppt/slides/slide14.xml><?xml version="1.0" encoding="utf-8"?>
 <p:sld xmlns:a="http://schemas.openxmlformats.org/drawingml/2006/main" xmlns:r="http://schemas.openxmlformats.org/officeDocument/2006/relationships" xmlns:p="http://schemas.openxmlformats.org/presentationml/2006/main">
   <p:cSld>
     <p:spTree>
@@ -4304,112 +4556,73 @@
         </p:nvSpPr>
         <p:spPr/>
         <p:txBody>
-          <a:bodyPr/>
-          <a:lstStyle/>
-          <a:p>
-            <a:r>
-              <a:rPr lang="en-US" dirty="0"/>
-              <a:t>Random Forest Algorithm</a:t>
-            </a:r>
-          </a:p>
-        </p:txBody>
-      </p:sp>
-      <p:sp>
-        <p:nvSpPr>
-          <p:cNvPr id="3" name="Content Placeholder 2"/>
-          <p:cNvSpPr>
-            <a:spLocks noGrp="1"/>
-          </p:cNvSpPr>
-          <p:nvPr>
-            <p:ph idx="1"/>
-          </p:nvPr>
-        </p:nvSpPr>
-        <p:spPr/>
-        <p:txBody>
           <a:bodyPr>
             <a:normAutofit/>
           </a:bodyPr>
           <a:lstStyle/>
           <a:p>
-            <a:pPr marL="514350" indent="-514350">
-              <a:buFont typeface="+mj-lt"/>
-              <a:buAutoNum type="arabicPeriod"/>
-            </a:pPr>
-            <a:r>
-              <a:rPr lang="en-IN" dirty="0"/>
-              <a:t>Create bootstrapped dataset</a:t>
-            </a:r>
-          </a:p>
-          <a:p>
-            <a:pPr marL="514350" indent="-514350">
-              <a:buFont typeface="+mj-lt"/>
-              <a:buAutoNum type="arabicPeriod"/>
-            </a:pPr>
-            <a:r>
-              <a:rPr lang="en-IN" dirty="0"/>
-              <a:t>Select </a:t>
-            </a:r>
-            <a:r>
-              <a:rPr lang="en-IN"/>
-              <a:t>subset of features</a:t>
-            </a:r>
-            <a:endParaRPr lang="en-IN" dirty="0"/>
-          </a:p>
-          <a:p>
-            <a:pPr marL="914400" lvl="1" indent="-514350"/>
-            <a:r>
-              <a:rPr lang="en-IN" dirty="0"/>
-              <a:t>Bagging approach </a:t>
-            </a:r>
-          </a:p>
-          <a:p>
-            <a:pPr marL="514350" indent="-514350">
-              <a:buFont typeface="+mj-lt"/>
-              <a:buAutoNum type="arabicPeriod"/>
-            </a:pPr>
-            <a:r>
-              <a:rPr lang="en-IN" dirty="0"/>
-              <a:t>Create decision tree using selected features</a:t>
-            </a:r>
-          </a:p>
-          <a:p>
-            <a:pPr marL="514350" indent="-514350">
-              <a:buFont typeface="+mj-lt"/>
-              <a:buAutoNum type="arabicPeriod"/>
-            </a:pPr>
-            <a:r>
-              <a:rPr lang="en-IN" dirty="0"/>
-              <a:t>Repeat Steps 1 to 3</a:t>
-            </a:r>
-          </a:p>
-          <a:p>
-            <a:pPr marL="914400" lvl="1" indent="-514350"/>
             <a:r>
               <a:rPr lang="en-US" dirty="0"/>
-              <a:t>Number of </a:t>
-            </a:r>
-            <a:r>
-              <a:rPr lang="en-IN" dirty="0"/>
-              <a:t>decision tree</a:t>
-            </a:r>
+              <a:t>What is Federated Learning?</a:t>
+            </a:r>
+          </a:p>
+        </p:txBody>
+      </p:sp>
+      <p:sp>
+        <p:nvSpPr>
+          <p:cNvPr id="4" name="Content Placeholder 3"/>
+          <p:cNvSpPr>
+            <a:spLocks noGrp="1"/>
+          </p:cNvSpPr>
+          <p:nvPr>
+            <p:ph idx="1"/>
+          </p:nvPr>
+        </p:nvSpPr>
+        <p:spPr/>
+        <p:txBody>
+          <a:bodyPr/>
+          <a:lstStyle/>
+          <a:p>
             <a:r>
               <a:rPr lang="en-US" dirty="0"/>
-              <a:t>s</a:t>
-            </a:r>
-          </a:p>
-          <a:p>
-            <a:pPr marL="514350" indent="-514350">
-              <a:buNone/>
-            </a:pPr>
-            <a:endParaRPr lang="en-IN" dirty="0"/>
-          </a:p>
-          <a:p>
-            <a:pPr marL="914400" lvl="1" indent="-514350"/>
-            <a:endParaRPr lang="en-IN" dirty="0"/>
+              <a:t>Federated Learning is a machine learning technique</a:t>
+            </a:r>
+          </a:p>
+          <a:p>
+            <a:r>
+              <a:rPr lang="en-US" dirty="0"/>
+              <a:t>Trains models on decentralized data</a:t>
+            </a:r>
+          </a:p>
+          <a:p>
+            <a:r>
+              <a:rPr lang="en-US" dirty="0"/>
+              <a:t>Data is distributed across multiple devices or nodes</a:t>
+            </a:r>
+          </a:p>
+          <a:p>
+            <a:r>
+              <a:rPr lang="en-US" dirty="0"/>
+              <a:t>Devices include smartphones, IoT devices, and edge devices</a:t>
+            </a:r>
+          </a:p>
+          <a:p>
+            <a:r>
+              <a:rPr lang="en-US" dirty="0"/>
+              <a:t>Data remains on local devices (not centralized)</a:t>
+            </a:r>
+          </a:p>
+          <a:p>
+            <a:endParaRPr lang="en-US" dirty="0"/>
           </a:p>
         </p:txBody>
       </p:sp>
     </p:spTree>
+    <p:extLst>
+      <p:ext uri="{BB962C8B-B14F-4D97-AF65-F5344CB8AC3E}">
+        <p14:creationId xmlns:p14="http://schemas.microsoft.com/office/powerpoint/2010/main" val="769330381"/>
+      </p:ext>
+    </p:extLst>
   </p:cSld>
   <p:clrMapOvr>
     <a:masterClrMapping/>
@@ -4446,104 +4659,108 @@
         </p:nvSpPr>
         <p:spPr/>
         <p:txBody>
-          <a:bodyPr/>
+          <a:bodyPr>
+            <a:normAutofit/>
+          </a:bodyPr>
           <a:lstStyle/>
           <a:p>
             <a:r>
               <a:rPr lang="en-US" dirty="0"/>
-              <a:t>Random Forest</a:t>
-            </a:r>
-          </a:p>
-        </p:txBody>
-      </p:sp>
-      <p:pic>
-        <p:nvPicPr>
-          <p:cNvPr id="6" name="Picture 5" descr="RandomForest.png"/>
-          <p:cNvPicPr>
-            <a:picLocks noChangeAspect="1"/>
-          </p:cNvPicPr>
-          <p:nvPr/>
-        </p:nvPicPr>
-        <p:blipFill>
-          <a:blip r:embed="rId2"/>
-          <a:stretch>
-            <a:fillRect/>
-          </a:stretch>
-        </p:blipFill>
-        <p:spPr>
-          <a:xfrm>
-            <a:off x="1714500" y="1828800"/>
-            <a:ext cx="5715000" cy="3810000"/>
-          </a:xfrm>
-          <a:prstGeom prst="rect">
-            <a:avLst/>
-          </a:prstGeom>
-        </p:spPr>
-      </p:pic>
-      <p:sp>
-        <p:nvSpPr>
-          <p:cNvPr id="7" name="Text Box 10"/>
-          <p:cNvSpPr txBox="1">
-            <a:spLocks noChangeArrowheads="1"/>
-          </p:cNvSpPr>
-          <p:nvPr/>
-        </p:nvSpPr>
-        <p:spPr bwMode="auto">
-          <a:xfrm rot="10800000" flipV="1">
-            <a:off x="0" y="6519446"/>
-            <a:ext cx="1828800" cy="338554"/>
-          </a:xfrm>
-          <a:prstGeom prst="rect">
-            <a:avLst/>
-          </a:prstGeom>
-          <a:noFill/>
-          <a:ln w="9525">
-            <a:noFill/>
-            <a:miter lim="800000"/>
-            <a:headEnd/>
-            <a:tailEnd/>
-          </a:ln>
-          <a:effectLst/>
-        </p:spPr>
-        <p:txBody>
-          <a:bodyPr wrap="square">
-            <a:spAutoFit/>
+              <a:t>How Federated Learning Works?</a:t>
+            </a:r>
+          </a:p>
+        </p:txBody>
+      </p:sp>
+      <p:sp>
+        <p:nvSpPr>
+          <p:cNvPr id="4" name="Content Placeholder 3"/>
+          <p:cNvSpPr>
+            <a:spLocks noGrp="1"/>
+          </p:cNvSpPr>
+          <p:nvPr>
+            <p:ph idx="1"/>
+          </p:nvPr>
+        </p:nvSpPr>
+        <p:spPr/>
+        <p:txBody>
+          <a:bodyPr>
+            <a:normAutofit fontScale="92500"/>
           </a:bodyPr>
           <a:lstStyle/>
           <a:p>
-            <a:pPr>
-              <a:spcBef>
-                <a:spcPct val="50000"/>
-              </a:spcBef>
+            <a:pPr marL="514350" indent="-514350">
+              <a:buFont typeface="+mj-lt"/>
+              <a:buAutoNum type="arabicPeriod"/>
             </a:pPr>
             <a:r>
-              <a:rPr lang="en-US" sz="1600" b="1" dirty="0">
-                <a:solidFill>
-                  <a:srgbClr val="FF0000"/>
-                </a:solidFill>
-              </a:rPr>
-              <a:t>Image </a:t>
-            </a:r>
-            <a:r>
-              <a:rPr lang="en-US" sz="1600" b="1" dirty="0" err="1">
-                <a:solidFill>
-                  <a:srgbClr val="FF0000"/>
-                </a:solidFill>
-              </a:rPr>
-              <a:t>ack</a:t>
-            </a:r>
-            <a:r>
-              <a:rPr lang="en-US" sz="1600" b="1" dirty="0">
-                <a:solidFill>
-                  <a:srgbClr val="FF0000"/>
-                </a:solidFill>
-              </a:rPr>
-              <a:t> – Google</a:t>
-            </a:r>
+              <a:rPr lang="en-US" dirty="0"/>
+              <a:t>Model is sent to multiple devices</a:t>
+            </a:r>
+          </a:p>
+          <a:p>
+            <a:pPr marL="514350" indent="-514350">
+              <a:buFont typeface="+mj-lt"/>
+              <a:buAutoNum type="arabicPeriod"/>
+            </a:pPr>
+            <a:r>
+              <a:rPr lang="en-US" dirty="0"/>
+              <a:t>Each device trains the model locally using its own data</a:t>
+            </a:r>
+          </a:p>
+          <a:p>
+            <a:pPr marL="514350" indent="-514350">
+              <a:buFont typeface="+mj-lt"/>
+              <a:buAutoNum type="arabicPeriod"/>
+            </a:pPr>
+            <a:r>
+              <a:rPr lang="en-US" dirty="0"/>
+              <a:t>Local model updates (not raw data) are generated</a:t>
+            </a:r>
+          </a:p>
+          <a:p>
+            <a:pPr marL="514350" indent="-514350">
+              <a:buFont typeface="+mj-lt"/>
+              <a:buAutoNum type="arabicPeriod"/>
+            </a:pPr>
+            <a:r>
+              <a:rPr lang="en-US" dirty="0"/>
+              <a:t>Updates are sent to a central server</a:t>
+            </a:r>
+          </a:p>
+          <a:p>
+            <a:pPr marL="514350" indent="-514350">
+              <a:buFont typeface="+mj-lt"/>
+              <a:buAutoNum type="arabicPeriod"/>
+            </a:pPr>
+            <a:r>
+              <a:rPr lang="en-US" dirty="0"/>
+              <a:t>Server aggregates updates from multiple devices</a:t>
+            </a:r>
+          </a:p>
+          <a:p>
+            <a:pPr marL="514350" indent="-514350">
+              <a:buFont typeface="+mj-lt"/>
+              <a:buAutoNum type="arabicPeriod"/>
+            </a:pPr>
+            <a:r>
+              <a:rPr lang="en-US" dirty="0"/>
+              <a:t>A global model is updated and redistributed</a:t>
+            </a:r>
+          </a:p>
+          <a:p>
+            <a:endParaRPr lang="en-US" dirty="0"/>
+          </a:p>
+          <a:p>
+            <a:endParaRPr lang="en-US" dirty="0"/>
           </a:p>
         </p:txBody>
       </p:sp>
     </p:spTree>
+    <p:extLst>
+      <p:ext uri="{BB962C8B-B14F-4D97-AF65-F5344CB8AC3E}">
+        <p14:creationId xmlns:p14="http://schemas.microsoft.com/office/powerpoint/2010/main" val="3921225408"/>
+      </p:ext>
+    </p:extLst>
   </p:cSld>
   <p:clrMapOvr>
     <a:masterClrMapping/>

--- a/Presentations/FederatedLearning.pptx
+++ b/Presentations/FederatedLearning.pptx
@@ -5,7 +5,7 @@
     <p:sldMasterId id="2147483648" r:id="rId1"/>
   </p:sldMasterIdLst>
   <p:notesMasterIdLst>
-    <p:notesMasterId r:id="rId16"/>
+    <p:notesMasterId r:id="rId22"/>
   </p:notesMasterIdLst>
   <p:sldIdLst>
     <p:sldId id="256" r:id="rId2"/>
@@ -19,9 +19,15 @@
     <p:sldId id="283" r:id="rId10"/>
     <p:sldId id="276" r:id="rId11"/>
     <p:sldId id="284" r:id="rId12"/>
-    <p:sldId id="274" r:id="rId13"/>
-    <p:sldId id="275" r:id="rId14"/>
-    <p:sldId id="269" r:id="rId15"/>
+    <p:sldId id="285" r:id="rId13"/>
+    <p:sldId id="286" r:id="rId14"/>
+    <p:sldId id="287" r:id="rId15"/>
+    <p:sldId id="288" r:id="rId16"/>
+    <p:sldId id="289" r:id="rId17"/>
+    <p:sldId id="290" r:id="rId18"/>
+    <p:sldId id="274" r:id="rId19"/>
+    <p:sldId id="275" r:id="rId20"/>
+    <p:sldId id="269" r:id="rId21"/>
   </p:sldIdLst>
   <p:sldSz cx="9144000" cy="6858000" type="screen4x3"/>
   <p:notesSz cx="6858000" cy="9144000"/>
@@ -3685,7 +3691,7 @@
           <a:p>
             <a:r>
               <a:rPr lang="en-US" dirty="0"/>
-              <a:t>Federated Learning – Key Idea</a:t>
+              <a:t>How Federated Learning Works?</a:t>
             </a:r>
           </a:p>
         </p:txBody>
@@ -3769,12 +3775,14 @@
         </p:nvSpPr>
         <p:spPr/>
         <p:txBody>
-          <a:bodyPr/>
-          <a:lstStyle/>
-          <a:p>
-            <a:r>
-              <a:rPr lang="en-US" dirty="0"/>
-              <a:t>Advantages</a:t>
+          <a:bodyPr>
+            <a:normAutofit/>
+          </a:bodyPr>
+          <a:lstStyle/>
+          <a:p>
+            <a:r>
+              <a:rPr lang="en-US" dirty="0"/>
+              <a:t>Types of Federated Learning</a:t>
             </a:r>
           </a:p>
         </p:txBody>
@@ -3795,29 +3803,27 @@
           <a:lstStyle/>
           <a:p>
             <a:r>
-              <a:rPr lang="en-IN" dirty="0"/>
-              <a:t>Less over-fitting by using multiple trees</a:t>
-            </a:r>
-          </a:p>
-          <a:p>
-            <a:r>
-              <a:rPr lang="en-IN" dirty="0"/>
-              <a:t>More accurate as compared to single tree</a:t>
-            </a:r>
+              <a:rPr lang="en-US" dirty="0"/>
+              <a:t>Federated Learning can be implemented using different strategies</a:t>
+            </a:r>
+          </a:p>
+          <a:p>
+            <a:r>
+              <a:rPr lang="en-US" dirty="0"/>
+              <a:t>These approaches vary based on system architecture and communication style</a:t>
+            </a:r>
+          </a:p>
+          <a:p>
             <a:endParaRPr lang="en-US" dirty="0"/>
           </a:p>
-          <a:p>
-            <a:endParaRPr lang="en-US" dirty="0"/>
-          </a:p>
-          <a:p>
-            <a:endParaRPr lang="en-US" dirty="0"/>
-          </a:p>
-          <a:p>
-            <a:endParaRPr lang="en-US" dirty="0"/>
-          </a:p>
         </p:txBody>
       </p:sp>
     </p:spTree>
+    <p:extLst>
+      <p:ext uri="{BB962C8B-B14F-4D97-AF65-F5344CB8AC3E}">
+        <p14:creationId xmlns:p14="http://schemas.microsoft.com/office/powerpoint/2010/main" val="519482544"/>
+      </p:ext>
+    </p:extLst>
   </p:cSld>
   <p:clrMapOvr>
     <a:masterClrMapping/>
@@ -3854,12 +3860,14 @@
         </p:nvSpPr>
         <p:spPr/>
         <p:txBody>
-          <a:bodyPr/>
-          <a:lstStyle/>
-          <a:p>
-            <a:r>
-              <a:rPr lang="en-US" dirty="0"/>
-              <a:t>Disadvantages</a:t>
+          <a:bodyPr>
+            <a:normAutofit/>
+          </a:bodyPr>
+          <a:lstStyle/>
+          <a:p>
+            <a:r>
+              <a:rPr lang="en-US" dirty="0"/>
+              <a:t>Types of Federated Learning</a:t>
             </a:r>
           </a:p>
         </p:txBody>
@@ -3881,19 +3889,32 @@
           <a:p>
             <a:r>
               <a:rPr lang="en-US" dirty="0"/>
-              <a:t>Computationally expensive</a:t>
-            </a:r>
-          </a:p>
-          <a:p>
-            <a:r>
-              <a:rPr lang="en-IN" dirty="0"/>
-              <a:t>Less interpretable than decision tree</a:t>
-            </a:r>
+              <a:t>Centralized Federated Learning</a:t>
+            </a:r>
+          </a:p>
+          <a:p>
+            <a:r>
+              <a:rPr lang="en-US" dirty="0"/>
+              <a:t>Decentralized Federated Learning</a:t>
+            </a:r>
+          </a:p>
+          <a:p>
+            <a:r>
+              <a:rPr lang="en-US" dirty="0"/>
+              <a:t>Heterogeneous Federated Learning</a:t>
+            </a:r>
+          </a:p>
+          <a:p>
             <a:endParaRPr lang="en-US" dirty="0"/>
           </a:p>
         </p:txBody>
       </p:sp>
     </p:spTree>
+    <p:extLst>
+      <p:ext uri="{BB962C8B-B14F-4D97-AF65-F5344CB8AC3E}">
+        <p14:creationId xmlns:p14="http://schemas.microsoft.com/office/powerpoint/2010/main" val="3093427834"/>
+      </p:ext>
+    </p:extLst>
   </p:cSld>
   <p:clrMapOvr>
     <a:masterClrMapping/>
@@ -3925,40 +3946,612 @@
             <a:spLocks noGrp="1"/>
           </p:cNvSpPr>
           <p:nvPr>
-            <p:ph type="ctrTitle"/>
-          </p:nvPr>
-        </p:nvSpPr>
-        <p:spPr/>
-        <p:txBody>
-          <a:bodyPr/>
-          <a:lstStyle/>
-          <a:p>
-            <a:r>
-              <a:rPr lang="en-US" dirty="0"/>
-              <a:t>Questions?</a:t>
-            </a:r>
-          </a:p>
-        </p:txBody>
-      </p:sp>
-      <p:sp>
-        <p:nvSpPr>
-          <p:cNvPr id="3" name="Subtitle 2"/>
-          <p:cNvSpPr>
-            <a:spLocks noGrp="1"/>
-          </p:cNvSpPr>
-          <p:nvPr>
-            <p:ph type="subTitle" idx="1"/>
-          </p:nvPr>
-        </p:nvSpPr>
-        <p:spPr/>
-        <p:txBody>
-          <a:bodyPr/>
-          <a:lstStyle/>
-          <a:p>
-            <a:r>
-              <a:rPr lang="en-US" dirty="0"/>
-              <a:t>Thank you</a:t>
-            </a:r>
+            <p:ph type="title"/>
+          </p:nvPr>
+        </p:nvSpPr>
+        <p:spPr/>
+        <p:txBody>
+          <a:bodyPr>
+            <a:normAutofit/>
+          </a:bodyPr>
+          <a:lstStyle/>
+          <a:p>
+            <a:r>
+              <a:rPr lang="en-US" dirty="0"/>
+              <a:t>Centralized Federated Learning</a:t>
+            </a:r>
+          </a:p>
+        </p:txBody>
+      </p:sp>
+      <p:sp>
+        <p:nvSpPr>
+          <p:cNvPr id="4" name="Content Placeholder 3"/>
+          <p:cNvSpPr>
+            <a:spLocks noGrp="1"/>
+          </p:cNvSpPr>
+          <p:nvPr>
+            <p:ph idx="1"/>
+          </p:nvPr>
+        </p:nvSpPr>
+        <p:spPr/>
+        <p:txBody>
+          <a:bodyPr>
+            <a:normAutofit lnSpcReduction="10000"/>
+          </a:bodyPr>
+          <a:lstStyle/>
+          <a:p>
+            <a:r>
+              <a:rPr lang="en-US" dirty="0"/>
+              <a:t>Uses a central server to manage the training process</a:t>
+            </a:r>
+          </a:p>
+          <a:p>
+            <a:r>
+              <a:rPr lang="en-US" dirty="0"/>
+              <a:t>Server responsibilities:</a:t>
+            </a:r>
+          </a:p>
+          <a:p>
+            <a:pPr lvl="1"/>
+            <a:r>
+              <a:rPr lang="en-US" dirty="0"/>
+              <a:t>Select participating devices (nodes)</a:t>
+            </a:r>
+          </a:p>
+          <a:p>
+            <a:pPr lvl="1"/>
+            <a:r>
+              <a:rPr lang="en-US" dirty="0"/>
+              <a:t>Aggregate model updates from all devices</a:t>
+            </a:r>
+          </a:p>
+          <a:p>
+            <a:pPr lvl="1"/>
+            <a:r>
+              <a:rPr lang="en-US" dirty="0"/>
+              <a:t>All nodes send updates to the central server</a:t>
+            </a:r>
+          </a:p>
+          <a:p>
+            <a:r>
+              <a:rPr lang="en-US" dirty="0"/>
+              <a:t>Limitation:</a:t>
+            </a:r>
+          </a:p>
+          <a:p>
+            <a:pPr lvl="1"/>
+            <a:r>
+              <a:rPr lang="en-US" dirty="0"/>
+              <a:t>Can become a bottleneck</a:t>
+            </a:r>
+          </a:p>
+          <a:p>
+            <a:pPr lvl="1"/>
+            <a:r>
+              <a:rPr lang="en-US" dirty="0"/>
+              <a:t>Single point of failure</a:t>
+            </a:r>
+          </a:p>
+          <a:p>
+            <a:endParaRPr lang="en-US" dirty="0"/>
+          </a:p>
+          <a:p>
+            <a:endParaRPr lang="en-US" dirty="0"/>
+          </a:p>
+        </p:txBody>
+      </p:sp>
+    </p:spTree>
+    <p:extLst>
+      <p:ext uri="{BB962C8B-B14F-4D97-AF65-F5344CB8AC3E}">
+        <p14:creationId xmlns:p14="http://schemas.microsoft.com/office/powerpoint/2010/main" val="9711770"/>
+      </p:ext>
+    </p:extLst>
+  </p:cSld>
+  <p:clrMapOvr>
+    <a:masterClrMapping/>
+  </p:clrMapOvr>
+</p:sld>
+</file>
+
+<file path=ppt/slides/slide15.xml><?xml version="1.0" encoding="utf-8"?>
+<p:sld xmlns:a="http://schemas.openxmlformats.org/drawingml/2006/main" xmlns:r="http://schemas.openxmlformats.org/officeDocument/2006/relationships" xmlns:p="http://schemas.openxmlformats.org/presentationml/2006/main">
+  <p:cSld>
+    <p:spTree>
+      <p:nvGrpSpPr>
+        <p:cNvPr id="1" name=""/>
+        <p:cNvGrpSpPr/>
+        <p:nvPr/>
+      </p:nvGrpSpPr>
+      <p:grpSpPr>
+        <a:xfrm>
+          <a:off x="0" y="0"/>
+          <a:ext cx="0" cy="0"/>
+          <a:chOff x="0" y="0"/>
+          <a:chExt cx="0" cy="0"/>
+        </a:xfrm>
+      </p:grpSpPr>
+      <p:sp>
+        <p:nvSpPr>
+          <p:cNvPr id="2" name="Title 1"/>
+          <p:cNvSpPr>
+            <a:spLocks noGrp="1"/>
+          </p:cNvSpPr>
+          <p:nvPr>
+            <p:ph type="title"/>
+          </p:nvPr>
+        </p:nvSpPr>
+        <p:spPr/>
+        <p:txBody>
+          <a:bodyPr>
+            <a:normAutofit/>
+          </a:bodyPr>
+          <a:lstStyle/>
+          <a:p>
+            <a:r>
+              <a:rPr lang="en-US" dirty="0"/>
+              <a:t>Decentralized Federated Learning</a:t>
+            </a:r>
+          </a:p>
+        </p:txBody>
+      </p:sp>
+      <p:sp>
+        <p:nvSpPr>
+          <p:cNvPr id="4" name="Content Placeholder 3"/>
+          <p:cNvSpPr>
+            <a:spLocks noGrp="1"/>
+          </p:cNvSpPr>
+          <p:nvPr>
+            <p:ph idx="1"/>
+          </p:nvPr>
+        </p:nvSpPr>
+        <p:spPr/>
+        <p:txBody>
+          <a:bodyPr/>
+          <a:lstStyle/>
+          <a:p>
+            <a:r>
+              <a:rPr lang="en-US" dirty="0"/>
+              <a:t>No central server involved</a:t>
+            </a:r>
+          </a:p>
+          <a:p>
+            <a:r>
+              <a:rPr lang="en-US" dirty="0"/>
+              <a:t>Devices (nodes) communicate and share updates among themselves</a:t>
+            </a:r>
+          </a:p>
+          <a:p>
+            <a:r>
+              <a:rPr lang="en-US" dirty="0"/>
+              <a:t>Eliminates single point of failure</a:t>
+            </a:r>
+          </a:p>
+          <a:p>
+            <a:r>
+              <a:rPr lang="en-US" dirty="0"/>
+              <a:t>Reduces bottleneck issues</a:t>
+            </a:r>
+          </a:p>
+          <a:p>
+            <a:r>
+              <a:rPr lang="en-US" dirty="0"/>
+              <a:t>Key consideration:</a:t>
+            </a:r>
+          </a:p>
+          <a:p>
+            <a:pPr lvl="1"/>
+            <a:r>
+              <a:rPr lang="en-US" dirty="0"/>
+              <a:t>Performance depends on network topology</a:t>
+            </a:r>
+          </a:p>
+          <a:p>
+            <a:endParaRPr lang="en-US" dirty="0"/>
+          </a:p>
+        </p:txBody>
+      </p:sp>
+    </p:spTree>
+    <p:extLst>
+      <p:ext uri="{BB962C8B-B14F-4D97-AF65-F5344CB8AC3E}">
+        <p14:creationId xmlns:p14="http://schemas.microsoft.com/office/powerpoint/2010/main" val="3362566953"/>
+      </p:ext>
+    </p:extLst>
+  </p:cSld>
+  <p:clrMapOvr>
+    <a:masterClrMapping/>
+  </p:clrMapOvr>
+</p:sld>
+</file>
+
+<file path=ppt/slides/slide16.xml><?xml version="1.0" encoding="utf-8"?>
+<p:sld xmlns:a="http://schemas.openxmlformats.org/drawingml/2006/main" xmlns:r="http://schemas.openxmlformats.org/officeDocument/2006/relationships" xmlns:p="http://schemas.openxmlformats.org/presentationml/2006/main">
+  <p:cSld>
+    <p:spTree>
+      <p:nvGrpSpPr>
+        <p:cNvPr id="1" name=""/>
+        <p:cNvGrpSpPr/>
+        <p:nvPr/>
+      </p:nvGrpSpPr>
+      <p:grpSpPr>
+        <a:xfrm>
+          <a:off x="0" y="0"/>
+          <a:ext cx="0" cy="0"/>
+          <a:chOff x="0" y="0"/>
+          <a:chExt cx="0" cy="0"/>
+        </a:xfrm>
+      </p:grpSpPr>
+      <p:sp>
+        <p:nvSpPr>
+          <p:cNvPr id="2" name="Title 1"/>
+          <p:cNvSpPr>
+            <a:spLocks noGrp="1"/>
+          </p:cNvSpPr>
+          <p:nvPr>
+            <p:ph type="title"/>
+          </p:nvPr>
+        </p:nvSpPr>
+        <p:spPr/>
+        <p:txBody>
+          <a:bodyPr>
+            <a:normAutofit/>
+          </a:bodyPr>
+          <a:lstStyle/>
+          <a:p>
+            <a:r>
+              <a:rPr lang="en-US" dirty="0"/>
+              <a:t>Heterogeneous Federated Learning</a:t>
+            </a:r>
+          </a:p>
+        </p:txBody>
+      </p:sp>
+      <p:sp>
+        <p:nvSpPr>
+          <p:cNvPr id="4" name="Content Placeholder 3"/>
+          <p:cNvSpPr>
+            <a:spLocks noGrp="1"/>
+          </p:cNvSpPr>
+          <p:nvPr>
+            <p:ph idx="1"/>
+          </p:nvPr>
+        </p:nvSpPr>
+        <p:spPr/>
+        <p:txBody>
+          <a:bodyPr>
+            <a:normAutofit/>
+          </a:bodyPr>
+          <a:lstStyle/>
+          <a:p>
+            <a:r>
+              <a:rPr lang="en-US" dirty="0"/>
+              <a:t>Involves diverse clients such as:</a:t>
+            </a:r>
+          </a:p>
+          <a:p>
+            <a:pPr lvl="1"/>
+            <a:r>
+              <a:rPr lang="en-US" dirty="0"/>
+              <a:t>Smartphones</a:t>
+            </a:r>
+          </a:p>
+          <a:p>
+            <a:pPr lvl="1"/>
+            <a:r>
+              <a:rPr lang="en-US" dirty="0"/>
+              <a:t>IoT devices</a:t>
+            </a:r>
+          </a:p>
+          <a:p>
+            <a:r>
+              <a:rPr lang="en-US" dirty="0"/>
+              <a:t>Devices differ in hardware and software capabilities</a:t>
+            </a:r>
+          </a:p>
+          <a:p>
+            <a:r>
+              <a:rPr lang="en-US" dirty="0"/>
+              <a:t>Challenges:</a:t>
+            </a:r>
+          </a:p>
+          <a:p>
+            <a:pPr lvl="1"/>
+            <a:r>
+              <a:rPr lang="en-US" dirty="0"/>
+              <a:t>Varying computation power</a:t>
+            </a:r>
+          </a:p>
+          <a:p>
+            <a:pPr lvl="1"/>
+            <a:r>
+              <a:rPr lang="en-US" dirty="0"/>
+              <a:t>Communication constraints</a:t>
+            </a:r>
+          </a:p>
+          <a:p>
+            <a:endParaRPr lang="en-US" dirty="0"/>
+          </a:p>
+        </p:txBody>
+      </p:sp>
+    </p:spTree>
+    <p:extLst>
+      <p:ext uri="{BB962C8B-B14F-4D97-AF65-F5344CB8AC3E}">
+        <p14:creationId xmlns:p14="http://schemas.microsoft.com/office/powerpoint/2010/main" val="1107537839"/>
+      </p:ext>
+    </p:extLst>
+  </p:cSld>
+  <p:clrMapOvr>
+    <a:masterClrMapping/>
+  </p:clrMapOvr>
+</p:sld>
+</file>
+
+<file path=ppt/slides/slide17.xml><?xml version="1.0" encoding="utf-8"?>
+<p:sld xmlns:a="http://schemas.openxmlformats.org/drawingml/2006/main" xmlns:r="http://schemas.openxmlformats.org/officeDocument/2006/relationships" xmlns:p="http://schemas.openxmlformats.org/presentationml/2006/main">
+  <p:cSld>
+    <p:spTree>
+      <p:nvGrpSpPr>
+        <p:cNvPr id="1" name=""/>
+        <p:cNvGrpSpPr/>
+        <p:nvPr/>
+      </p:nvGrpSpPr>
+      <p:grpSpPr>
+        <a:xfrm>
+          <a:off x="0" y="0"/>
+          <a:ext cx="0" cy="0"/>
+          <a:chOff x="0" y="0"/>
+          <a:chExt cx="0" cy="0"/>
+        </a:xfrm>
+      </p:grpSpPr>
+      <p:sp>
+        <p:nvSpPr>
+          <p:cNvPr id="2" name="Title 1"/>
+          <p:cNvSpPr>
+            <a:spLocks noGrp="1"/>
+          </p:cNvSpPr>
+          <p:nvPr>
+            <p:ph type="title"/>
+          </p:nvPr>
+        </p:nvSpPr>
+        <p:spPr/>
+        <p:txBody>
+          <a:bodyPr>
+            <a:normAutofit/>
+          </a:bodyPr>
+          <a:lstStyle/>
+          <a:p>
+            <a:r>
+              <a:rPr lang="en-US" dirty="0"/>
+              <a:t>Types of Federated Learning</a:t>
+            </a:r>
+          </a:p>
+        </p:txBody>
+      </p:sp>
+      <p:sp>
+        <p:nvSpPr>
+          <p:cNvPr id="4" name="Content Placeholder 3"/>
+          <p:cNvSpPr>
+            <a:spLocks noGrp="1"/>
+          </p:cNvSpPr>
+          <p:nvPr>
+            <p:ph idx="1"/>
+          </p:nvPr>
+        </p:nvSpPr>
+        <p:spPr/>
+        <p:txBody>
+          <a:bodyPr/>
+          <a:lstStyle/>
+          <a:p>
+            <a:r>
+              <a:rPr lang="en-US" dirty="0"/>
+              <a:t>Different Federated Learning types address different system challenges</a:t>
+            </a:r>
+          </a:p>
+          <a:p>
+            <a:r>
+              <a:rPr lang="en-US" dirty="0"/>
+              <a:t>Centralized Federated Learning</a:t>
+            </a:r>
+          </a:p>
+          <a:p>
+            <a:pPr lvl="1"/>
+            <a:r>
+              <a:rPr lang="en-US" dirty="0"/>
+              <a:t>Simpler but prone to bottlenecks</a:t>
+            </a:r>
+          </a:p>
+          <a:p>
+            <a:r>
+              <a:rPr lang="en-US" dirty="0"/>
+              <a:t>Decentralized Federated Learning</a:t>
+            </a:r>
+          </a:p>
+          <a:p>
+            <a:pPr lvl="1"/>
+            <a:r>
+              <a:rPr lang="en-US" dirty="0"/>
+              <a:t>More robust but complex</a:t>
+            </a:r>
+          </a:p>
+          <a:p>
+            <a:r>
+              <a:rPr lang="en-US" dirty="0"/>
+              <a:t>Heterogeneous Federated Learning</a:t>
+            </a:r>
+          </a:p>
+          <a:p>
+            <a:pPr lvl="1"/>
+            <a:r>
+              <a:rPr lang="en-US" dirty="0"/>
+              <a:t>Realistic but requires adaptive methods</a:t>
+            </a:r>
+          </a:p>
+          <a:p>
+            <a:endParaRPr lang="en-US" dirty="0"/>
+          </a:p>
+        </p:txBody>
+      </p:sp>
+    </p:spTree>
+    <p:extLst>
+      <p:ext uri="{BB962C8B-B14F-4D97-AF65-F5344CB8AC3E}">
+        <p14:creationId xmlns:p14="http://schemas.microsoft.com/office/powerpoint/2010/main" val="244044808"/>
+      </p:ext>
+    </p:extLst>
+  </p:cSld>
+  <p:clrMapOvr>
+    <a:masterClrMapping/>
+  </p:clrMapOvr>
+</p:sld>
+</file>
+
+<file path=ppt/slides/slide18.xml><?xml version="1.0" encoding="utf-8"?>
+<p:sld xmlns:a="http://schemas.openxmlformats.org/drawingml/2006/main" xmlns:r="http://schemas.openxmlformats.org/officeDocument/2006/relationships" xmlns:p="http://schemas.openxmlformats.org/presentationml/2006/main">
+  <p:cSld>
+    <p:spTree>
+      <p:nvGrpSpPr>
+        <p:cNvPr id="1" name=""/>
+        <p:cNvGrpSpPr/>
+        <p:nvPr/>
+      </p:nvGrpSpPr>
+      <p:grpSpPr>
+        <a:xfrm>
+          <a:off x="0" y="0"/>
+          <a:ext cx="0" cy="0"/>
+          <a:chOff x="0" y="0"/>
+          <a:chExt cx="0" cy="0"/>
+        </a:xfrm>
+      </p:grpSpPr>
+      <p:sp>
+        <p:nvSpPr>
+          <p:cNvPr id="2" name="Title 1"/>
+          <p:cNvSpPr>
+            <a:spLocks noGrp="1"/>
+          </p:cNvSpPr>
+          <p:nvPr>
+            <p:ph type="title"/>
+          </p:nvPr>
+        </p:nvSpPr>
+        <p:spPr/>
+        <p:txBody>
+          <a:bodyPr/>
+          <a:lstStyle/>
+          <a:p>
+            <a:r>
+              <a:rPr lang="en-US" dirty="0"/>
+              <a:t>Advantages</a:t>
+            </a:r>
+          </a:p>
+        </p:txBody>
+      </p:sp>
+      <p:sp>
+        <p:nvSpPr>
+          <p:cNvPr id="4" name="Content Placeholder 3"/>
+          <p:cNvSpPr>
+            <a:spLocks noGrp="1"/>
+          </p:cNvSpPr>
+          <p:nvPr>
+            <p:ph idx="1"/>
+          </p:nvPr>
+        </p:nvSpPr>
+        <p:spPr/>
+        <p:txBody>
+          <a:bodyPr/>
+          <a:lstStyle/>
+          <a:p>
+            <a:r>
+              <a:rPr lang="en-IN" dirty="0"/>
+              <a:t>Less over-fitting by using multiple trees</a:t>
+            </a:r>
+          </a:p>
+          <a:p>
+            <a:r>
+              <a:rPr lang="en-IN" dirty="0"/>
+              <a:t>More accurate as compared to single tree</a:t>
+            </a:r>
+            <a:endParaRPr lang="en-US" dirty="0"/>
+          </a:p>
+          <a:p>
+            <a:endParaRPr lang="en-US" dirty="0"/>
+          </a:p>
+          <a:p>
+            <a:endParaRPr lang="en-US" dirty="0"/>
+          </a:p>
+          <a:p>
+            <a:endParaRPr lang="en-US" dirty="0"/>
+          </a:p>
+        </p:txBody>
+      </p:sp>
+    </p:spTree>
+  </p:cSld>
+  <p:clrMapOvr>
+    <a:masterClrMapping/>
+  </p:clrMapOvr>
+</p:sld>
+</file>
+
+<file path=ppt/slides/slide19.xml><?xml version="1.0" encoding="utf-8"?>
+<p:sld xmlns:a="http://schemas.openxmlformats.org/drawingml/2006/main" xmlns:r="http://schemas.openxmlformats.org/officeDocument/2006/relationships" xmlns:p="http://schemas.openxmlformats.org/presentationml/2006/main">
+  <p:cSld>
+    <p:spTree>
+      <p:nvGrpSpPr>
+        <p:cNvPr id="1" name=""/>
+        <p:cNvGrpSpPr/>
+        <p:nvPr/>
+      </p:nvGrpSpPr>
+      <p:grpSpPr>
+        <a:xfrm>
+          <a:off x="0" y="0"/>
+          <a:ext cx="0" cy="0"/>
+          <a:chOff x="0" y="0"/>
+          <a:chExt cx="0" cy="0"/>
+        </a:xfrm>
+      </p:grpSpPr>
+      <p:sp>
+        <p:nvSpPr>
+          <p:cNvPr id="2" name="Title 1"/>
+          <p:cNvSpPr>
+            <a:spLocks noGrp="1"/>
+          </p:cNvSpPr>
+          <p:nvPr>
+            <p:ph type="title"/>
+          </p:nvPr>
+        </p:nvSpPr>
+        <p:spPr/>
+        <p:txBody>
+          <a:bodyPr/>
+          <a:lstStyle/>
+          <a:p>
+            <a:r>
+              <a:rPr lang="en-US" dirty="0"/>
+              <a:t>Disadvantages</a:t>
+            </a:r>
+          </a:p>
+        </p:txBody>
+      </p:sp>
+      <p:sp>
+        <p:nvSpPr>
+          <p:cNvPr id="4" name="Content Placeholder 3"/>
+          <p:cNvSpPr>
+            <a:spLocks noGrp="1"/>
+          </p:cNvSpPr>
+          <p:nvPr>
+            <p:ph idx="1"/>
+          </p:nvPr>
+        </p:nvSpPr>
+        <p:spPr/>
+        <p:txBody>
+          <a:bodyPr/>
+          <a:lstStyle/>
+          <a:p>
+            <a:r>
+              <a:rPr lang="en-US" dirty="0"/>
+              <a:t>Computationally expensive</a:t>
+            </a:r>
+          </a:p>
+          <a:p>
+            <a:r>
+              <a:rPr lang="en-IN" dirty="0"/>
+              <a:t>Less interpretable than decision tree</a:t>
+            </a:r>
+            <a:endParaRPr lang="en-US" dirty="0"/>
           </a:p>
         </p:txBody>
       </p:sp>
@@ -4040,6 +4633,12 @@
           <a:p>
             <a:r>
               <a:rPr lang="en-US" dirty="0"/>
+              <a:t>Types of Federated Learning</a:t>
+            </a:r>
+          </a:p>
+          <a:p>
+            <a:r>
+              <a:rPr lang="en-US" dirty="0"/>
               <a:t>Advantages </a:t>
             </a:r>
           </a:p>
@@ -4051,6 +4650,75 @@
           </a:p>
           <a:p>
             <a:endParaRPr lang="en-US" dirty="0"/>
+          </a:p>
+        </p:txBody>
+      </p:sp>
+    </p:spTree>
+  </p:cSld>
+  <p:clrMapOvr>
+    <a:masterClrMapping/>
+  </p:clrMapOvr>
+</p:sld>
+</file>
+
+<file path=ppt/slides/slide20.xml><?xml version="1.0" encoding="utf-8"?>
+<p:sld xmlns:a="http://schemas.openxmlformats.org/drawingml/2006/main" xmlns:r="http://schemas.openxmlformats.org/officeDocument/2006/relationships" xmlns:p="http://schemas.openxmlformats.org/presentationml/2006/main">
+  <p:cSld>
+    <p:spTree>
+      <p:nvGrpSpPr>
+        <p:cNvPr id="1" name=""/>
+        <p:cNvGrpSpPr/>
+        <p:nvPr/>
+      </p:nvGrpSpPr>
+      <p:grpSpPr>
+        <a:xfrm>
+          <a:off x="0" y="0"/>
+          <a:ext cx="0" cy="0"/>
+          <a:chOff x="0" y="0"/>
+          <a:chExt cx="0" cy="0"/>
+        </a:xfrm>
+      </p:grpSpPr>
+      <p:sp>
+        <p:nvSpPr>
+          <p:cNvPr id="2" name="Title 1"/>
+          <p:cNvSpPr>
+            <a:spLocks noGrp="1"/>
+          </p:cNvSpPr>
+          <p:nvPr>
+            <p:ph type="ctrTitle"/>
+          </p:nvPr>
+        </p:nvSpPr>
+        <p:spPr/>
+        <p:txBody>
+          <a:bodyPr/>
+          <a:lstStyle/>
+          <a:p>
+            <a:r>
+              <a:rPr lang="en-US" dirty="0"/>
+              <a:t>Questions?</a:t>
+            </a:r>
+          </a:p>
+        </p:txBody>
+      </p:sp>
+      <p:sp>
+        <p:nvSpPr>
+          <p:cNvPr id="3" name="Subtitle 2"/>
+          <p:cNvSpPr>
+            <a:spLocks noGrp="1"/>
+          </p:cNvSpPr>
+          <p:nvPr>
+            <p:ph type="subTitle" idx="1"/>
+          </p:nvPr>
+        </p:nvSpPr>
+        <p:spPr/>
+        <p:txBody>
+          <a:bodyPr/>
+          <a:lstStyle/>
+          <a:p>
+            <a:r>
+              <a:rPr lang="en-US" dirty="0"/>
+              <a:t>Thank you</a:t>
+            </a:r>
           </a:p>
         </p:txBody>
       </p:sp>
@@ -4466,13 +5134,13 @@
         <p:spPr/>
         <p:txBody>
           <a:bodyPr>
-            <a:normAutofit/>
+            <a:normAutofit fontScale="90000"/>
           </a:bodyPr>
           <a:lstStyle/>
           <a:p>
             <a:r>
               <a:rPr lang="en-US" dirty="0"/>
-              <a:t>Key Takeaway</a:t>
+              <a:t>Traditional ML v/s Federated Learning </a:t>
             </a:r>
           </a:p>
         </p:txBody>

--- a/Presentations/FederatedLearning.pptx
+++ b/Presentations/FederatedLearning.pptx
@@ -5,7 +5,7 @@
     <p:sldMasterId id="2147483648" r:id="rId1"/>
   </p:sldMasterIdLst>
   <p:notesMasterIdLst>
-    <p:notesMasterId r:id="rId22"/>
+    <p:notesMasterId r:id="rId23"/>
   </p:notesMasterIdLst>
   <p:sldIdLst>
     <p:sldId id="256" r:id="rId2"/>
@@ -26,8 +26,9 @@
     <p:sldId id="289" r:id="rId17"/>
     <p:sldId id="290" r:id="rId18"/>
     <p:sldId id="274" r:id="rId19"/>
-    <p:sldId id="275" r:id="rId20"/>
-    <p:sldId id="269" r:id="rId21"/>
+    <p:sldId id="291" r:id="rId20"/>
+    <p:sldId id="275" r:id="rId21"/>
+    <p:sldId id="269" r:id="rId22"/>
   </p:sldIdLst>
   <p:sldSz cx="9144000" cy="6858000" type="screen4x3"/>
   <p:notesSz cx="6858000" cy="9144000"/>
@@ -4431,12 +4432,14 @@
         </p:nvSpPr>
         <p:spPr/>
         <p:txBody>
-          <a:bodyPr/>
-          <a:lstStyle/>
-          <a:p>
-            <a:r>
-              <a:rPr lang="en-US" dirty="0"/>
-              <a:t>Advantages</a:t>
+          <a:bodyPr>
+            <a:normAutofit/>
+          </a:bodyPr>
+          <a:lstStyle/>
+          <a:p>
+            <a:r>
+              <a:rPr lang="en-US" dirty="0"/>
+              <a:t>Advantages of Federated Learning</a:t>
             </a:r>
           </a:p>
         </p:txBody>
@@ -4453,20 +4456,48 @@
         </p:nvSpPr>
         <p:spPr/>
         <p:txBody>
-          <a:bodyPr/>
-          <a:lstStyle/>
-          <a:p>
-            <a:r>
-              <a:rPr lang="en-IN" dirty="0"/>
-              <a:t>Less over-fitting by using multiple trees</a:t>
-            </a:r>
-          </a:p>
-          <a:p>
-            <a:r>
-              <a:rPr lang="en-IN" dirty="0"/>
-              <a:t>More accurate as compared to single tree</a:t>
-            </a:r>
-            <a:endParaRPr lang="en-US" dirty="0"/>
+          <a:bodyPr>
+            <a:normAutofit lnSpcReduction="10000"/>
+          </a:bodyPr>
+          <a:lstStyle/>
+          <a:p>
+            <a:r>
+              <a:rPr lang="en-US" dirty="0"/>
+              <a:t>Reduced Power Usage</a:t>
+            </a:r>
+          </a:p>
+          <a:p>
+            <a:pPr lvl="1"/>
+            <a:r>
+              <a:rPr lang="en-US" dirty="0"/>
+              <a:t>Reduced data size means reduced computation time and hence less power usage.</a:t>
+            </a:r>
+          </a:p>
+          <a:p>
+            <a:r>
+              <a:rPr lang="en-US" dirty="0"/>
+              <a:t>Guarantees Privacy</a:t>
+            </a:r>
+          </a:p>
+          <a:p>
+            <a:pPr lvl="1"/>
+            <a:r>
+              <a:rPr lang="en-US" dirty="0"/>
+              <a:t>Data stays on the device, maintaining privacy without loss of training.</a:t>
+            </a:r>
+          </a:p>
+          <a:p>
+            <a:r>
+              <a:rPr lang="en-US" dirty="0"/>
+              <a:t>No Device Performance Impact</a:t>
+            </a:r>
+          </a:p>
+          <a:p>
+            <a:pPr lvl="1"/>
+            <a:r>
+              <a:rPr lang="en-US" dirty="0"/>
+              <a:t>Training is done only when the device is in idle or charging state, hence no impact on performance.</a:t>
+            </a:r>
           </a:p>
           <a:p>
             <a:endParaRPr lang="en-US" dirty="0"/>
@@ -4516,12 +4547,14 @@
         </p:nvSpPr>
         <p:spPr/>
         <p:txBody>
-          <a:bodyPr/>
-          <a:lstStyle/>
-          <a:p>
-            <a:r>
-              <a:rPr lang="en-US" dirty="0"/>
-              <a:t>Disadvantages</a:t>
+          <a:bodyPr>
+            <a:normAutofit/>
+          </a:bodyPr>
+          <a:lstStyle/>
+          <a:p>
+            <a:r>
+              <a:rPr lang="en-US" dirty="0"/>
+              <a:t>Advantages of Federated Learning</a:t>
             </a:r>
           </a:p>
         </p:txBody>
@@ -4543,19 +4576,59 @@
           <a:p>
             <a:r>
               <a:rPr lang="en-US" dirty="0"/>
-              <a:t>Computationally expensive</a:t>
-            </a:r>
-          </a:p>
-          <a:p>
-            <a:r>
-              <a:rPr lang="en-IN" dirty="0"/>
-              <a:t>Less interpretable than decision tree</a:t>
-            </a:r>
+              <a:t>Scalability</a:t>
+            </a:r>
+          </a:p>
+          <a:p>
+            <a:pPr lvl="1"/>
+            <a:r>
+              <a:rPr lang="en-US" dirty="0"/>
+              <a:t>Scales with big, distributed datasets across multiple devices.</a:t>
+            </a:r>
+          </a:p>
+          <a:p>
+            <a:r>
+              <a:rPr lang="en-US" dirty="0"/>
+              <a:t>Better Model Performance</a:t>
+            </a:r>
+          </a:p>
+          <a:p>
+            <a:pPr lvl="1"/>
+            <a:r>
+              <a:rPr lang="en-US" dirty="0"/>
+              <a:t>Uses heterogeneous data from various devices to improve model accuracy.</a:t>
+            </a:r>
+          </a:p>
+          <a:p>
+            <a:r>
+              <a:rPr lang="en-US" dirty="0"/>
+              <a:t>Real-time Updates</a:t>
+            </a:r>
+          </a:p>
+          <a:p>
+            <a:pPr lvl="1"/>
+            <a:r>
+              <a:rPr lang="en-US" dirty="0"/>
+              <a:t>Allows real-time model updates on each device.</a:t>
+            </a:r>
+          </a:p>
+          <a:p>
             <a:endParaRPr lang="en-US" dirty="0"/>
           </a:p>
+          <a:p>
+            <a:endParaRPr lang="en-US" dirty="0"/>
+          </a:p>
+          <a:p>
+            <a:endParaRPr lang="en-US" dirty="0"/>
+          </a:p>
         </p:txBody>
       </p:sp>
     </p:spTree>
+    <p:extLst>
+      <p:ext uri="{BB962C8B-B14F-4D97-AF65-F5344CB8AC3E}">
+        <p14:creationId xmlns:p14="http://schemas.microsoft.com/office/powerpoint/2010/main" val="3155556318"/>
+      </p:ext>
+    </p:extLst>
   </p:cSld>
   <p:clrMapOvr>
     <a:masterClrMapping/>
@@ -4639,7 +4712,7 @@
           <a:p>
             <a:r>
               <a:rPr lang="en-US" dirty="0"/>
-              <a:t>Advantages </a:t>
+              <a:t>Advantages of Federated Learning </a:t>
             </a:r>
           </a:p>
           <a:p>
@@ -4662,6 +4735,82 @@
 </file>
 
 <file path=ppt/slides/slide20.xml><?xml version="1.0" encoding="utf-8"?>
+<p:sld xmlns:a="http://schemas.openxmlformats.org/drawingml/2006/main" xmlns:r="http://schemas.openxmlformats.org/officeDocument/2006/relationships" xmlns:p="http://schemas.openxmlformats.org/presentationml/2006/main">
+  <p:cSld>
+    <p:spTree>
+      <p:nvGrpSpPr>
+        <p:cNvPr id="1" name=""/>
+        <p:cNvGrpSpPr/>
+        <p:nvPr/>
+      </p:nvGrpSpPr>
+      <p:grpSpPr>
+        <a:xfrm>
+          <a:off x="0" y="0"/>
+          <a:ext cx="0" cy="0"/>
+          <a:chOff x="0" y="0"/>
+          <a:chExt cx="0" cy="0"/>
+        </a:xfrm>
+      </p:grpSpPr>
+      <p:sp>
+        <p:nvSpPr>
+          <p:cNvPr id="2" name="Title 1"/>
+          <p:cNvSpPr>
+            <a:spLocks noGrp="1"/>
+          </p:cNvSpPr>
+          <p:nvPr>
+            <p:ph type="title"/>
+          </p:nvPr>
+        </p:nvSpPr>
+        <p:spPr/>
+        <p:txBody>
+          <a:bodyPr/>
+          <a:lstStyle/>
+          <a:p>
+            <a:r>
+              <a:rPr lang="en-US" dirty="0"/>
+              <a:t>Disadvantages</a:t>
+            </a:r>
+          </a:p>
+        </p:txBody>
+      </p:sp>
+      <p:sp>
+        <p:nvSpPr>
+          <p:cNvPr id="4" name="Content Placeholder 3"/>
+          <p:cNvSpPr>
+            <a:spLocks noGrp="1"/>
+          </p:cNvSpPr>
+          <p:nvPr>
+            <p:ph idx="1"/>
+          </p:nvPr>
+        </p:nvSpPr>
+        <p:spPr/>
+        <p:txBody>
+          <a:bodyPr/>
+          <a:lstStyle/>
+          <a:p>
+            <a:r>
+              <a:rPr lang="en-US" dirty="0"/>
+              <a:t>Computationally expensive</a:t>
+            </a:r>
+          </a:p>
+          <a:p>
+            <a:r>
+              <a:rPr lang="en-IN" dirty="0"/>
+              <a:t>Less interpretable than decision tree</a:t>
+            </a:r>
+            <a:endParaRPr lang="en-US" dirty="0"/>
+          </a:p>
+        </p:txBody>
+      </p:sp>
+    </p:spTree>
+  </p:cSld>
+  <p:clrMapOvr>
+    <a:masterClrMapping/>
+  </p:clrMapOvr>
+</p:sld>
+</file>
+
+<file path=ppt/slides/slide21.xml><?xml version="1.0" encoding="utf-8"?>
 <p:sld xmlns:a="http://schemas.openxmlformats.org/drawingml/2006/main" xmlns:r="http://schemas.openxmlformats.org/officeDocument/2006/relationships" xmlns:p="http://schemas.openxmlformats.org/presentationml/2006/main">
   <p:cSld>
     <p:spTree>

--- a/Presentations/FederatedLearning.pptx
+++ b/Presentations/FederatedLearning.pptx
@@ -4700,7 +4700,13 @@
           <a:p>
             <a:r>
               <a:rPr lang="en-US" dirty="0"/>
-              <a:t>Federated Learning</a:t>
+              <a:t>What is Federated Learning?</a:t>
+            </a:r>
+          </a:p>
+          <a:p>
+            <a:r>
+              <a:rPr lang="en-US" dirty="0"/>
+              <a:t>How Federated Learning Works?</a:t>
             </a:r>
           </a:p>
           <a:p>
@@ -4718,7 +4724,7 @@
           <a:p>
             <a:r>
               <a:rPr lang="en-US" dirty="0"/>
-              <a:t>Disadvantages</a:t>
+              <a:t>Disadvantages of Federated Learning</a:t>
             </a:r>
           </a:p>
           <a:p>
@@ -4763,12 +4769,14 @@
         </p:nvSpPr>
         <p:spPr/>
         <p:txBody>
-          <a:bodyPr/>
-          <a:lstStyle/>
-          <a:p>
-            <a:r>
-              <a:rPr lang="en-US" dirty="0"/>
-              <a:t>Disadvantages</a:t>
+          <a:bodyPr>
+            <a:normAutofit fontScale="90000"/>
+          </a:bodyPr>
+          <a:lstStyle/>
+          <a:p>
+            <a:r>
+              <a:rPr lang="en-US" dirty="0"/>
+              <a:t>Disadvantages of Federated Learning</a:t>
             </a:r>
           </a:p>
         </p:txBody>
@@ -4785,20 +4793,48 @@
         </p:nvSpPr>
         <p:spPr/>
         <p:txBody>
-          <a:bodyPr/>
-          <a:lstStyle/>
-          <a:p>
-            <a:r>
-              <a:rPr lang="en-US" dirty="0"/>
-              <a:t>Computationally expensive</a:t>
-            </a:r>
-          </a:p>
-          <a:p>
-            <a:r>
-              <a:rPr lang="en-IN" dirty="0"/>
-              <a:t>Less interpretable than decision tree</a:t>
-            </a:r>
-            <a:endParaRPr lang="en-US" dirty="0"/>
+          <a:bodyPr>
+            <a:normAutofit fontScale="92500" lnSpcReduction="20000"/>
+          </a:bodyPr>
+          <a:lstStyle/>
+          <a:p>
+            <a:r>
+              <a:rPr lang="en-US" dirty="0"/>
+              <a:t>Network Latency</a:t>
+            </a:r>
+          </a:p>
+          <a:p>
+            <a:pPr lvl="1"/>
+            <a:r>
+              <a:rPr lang="en-US" dirty="0"/>
+              <a:t>The communication between the devices and the central server can be a bottleneck and may add latency to the training process.</a:t>
+            </a:r>
+          </a:p>
+          <a:p>
+            <a:r>
+              <a:rPr lang="en-US" dirty="0"/>
+              <a:t>Heterogeneous devices</a:t>
+            </a:r>
+          </a:p>
+          <a:p>
+            <a:pPr lvl="1"/>
+            <a:r>
+              <a:rPr lang="en-US" dirty="0"/>
+              <a:t>The devices can be heterogeneous in terms of hardware and software, which can make it difficult to ensure the compatibility and consistency of the models.</a:t>
+            </a:r>
+          </a:p>
+          <a:p>
+            <a:r>
+              <a:rPr lang="en-US" dirty="0"/>
+              <a:t>Data Quality</a:t>
+            </a:r>
+          </a:p>
+          <a:p>
+            <a:pPr lvl="1"/>
+            <a:r>
+              <a:rPr lang="en-US" dirty="0"/>
+              <a:t>The quality of data can vary across the devices, which can lead to poor model performance.</a:t>
+            </a:r>
           </a:p>
         </p:txBody>
       </p:sp>

--- a/Presentations/FederatedLearning.pptx
+++ b/Presentations/FederatedLearning.pptx
@@ -5,7 +5,7 @@
     <p:sldMasterId id="2147483648" r:id="rId1"/>
   </p:sldMasterIdLst>
   <p:notesMasterIdLst>
-    <p:notesMasterId r:id="rId23"/>
+    <p:notesMasterId r:id="rId29"/>
   </p:notesMasterIdLst>
   <p:sldIdLst>
     <p:sldId id="256" r:id="rId2"/>
@@ -25,10 +25,16 @@
     <p:sldId id="288" r:id="rId16"/>
     <p:sldId id="289" r:id="rId17"/>
     <p:sldId id="290" r:id="rId18"/>
-    <p:sldId id="274" r:id="rId19"/>
-    <p:sldId id="291" r:id="rId20"/>
-    <p:sldId id="275" r:id="rId21"/>
-    <p:sldId id="269" r:id="rId22"/>
+    <p:sldId id="292" r:id="rId19"/>
+    <p:sldId id="293" r:id="rId20"/>
+    <p:sldId id="294" r:id="rId21"/>
+    <p:sldId id="295" r:id="rId22"/>
+    <p:sldId id="296" r:id="rId23"/>
+    <p:sldId id="297" r:id="rId24"/>
+    <p:sldId id="274" r:id="rId25"/>
+    <p:sldId id="291" r:id="rId26"/>
+    <p:sldId id="275" r:id="rId27"/>
+    <p:sldId id="269" r:id="rId28"/>
   </p:sldIdLst>
   <p:sldSz cx="9144000" cy="6858000" type="screen4x3"/>
   <p:notesSz cx="6858000" cy="9144000"/>
@@ -4439,7 +4445,7 @@
           <a:p>
             <a:r>
               <a:rPr lang="en-US" dirty="0"/>
-              <a:t>Advantages of Federated Learning</a:t>
+              <a:t>Application of Federated Learning</a:t>
             </a:r>
           </a:p>
         </p:txBody>
@@ -4456,61 +4462,56 @@
         </p:nvSpPr>
         <p:spPr/>
         <p:txBody>
-          <a:bodyPr>
-            <a:normAutofit lnSpcReduction="10000"/>
-          </a:bodyPr>
-          <a:lstStyle/>
-          <a:p>
-            <a:r>
-              <a:rPr lang="en-US" dirty="0"/>
-              <a:t>Reduced Power Usage</a:t>
-            </a:r>
-          </a:p>
-          <a:p>
-            <a:pPr lvl="1"/>
-            <a:r>
-              <a:rPr lang="en-US" dirty="0"/>
-              <a:t>Reduced data size means reduced computation time and hence less power usage.</a:t>
-            </a:r>
-          </a:p>
-          <a:p>
-            <a:r>
-              <a:rPr lang="en-US" dirty="0"/>
-              <a:t>Guarantees Privacy</a:t>
-            </a:r>
-          </a:p>
-          <a:p>
-            <a:pPr lvl="1"/>
-            <a:r>
-              <a:rPr lang="en-US" dirty="0"/>
-              <a:t>Data stays on the device, maintaining privacy without loss of training.</a:t>
-            </a:r>
-          </a:p>
-          <a:p>
-            <a:r>
-              <a:rPr lang="en-US" dirty="0"/>
-              <a:t>No Device Performance Impact</a:t>
-            </a:r>
-          </a:p>
-          <a:p>
-            <a:pPr lvl="1"/>
-            <a:r>
-              <a:rPr lang="en-US" dirty="0"/>
-              <a:t>Training is done only when the device is in idle or charging state, hence no impact on performance.</a:t>
-            </a:r>
-          </a:p>
-          <a:p>
-            <a:endParaRPr lang="en-US" dirty="0"/>
-          </a:p>
-          <a:p>
-            <a:endParaRPr lang="en-US" dirty="0"/>
-          </a:p>
-          <a:p>
-            <a:endParaRPr lang="en-US" dirty="0"/>
+          <a:bodyPr/>
+          <a:lstStyle/>
+          <a:p>
+            <a:r>
+              <a:rPr lang="en-US" dirty="0"/>
+              <a:t>Google Keyboard (</a:t>
+            </a:r>
+            <a:r>
+              <a:rPr lang="en-US" dirty="0" err="1"/>
+              <a:t>Gboard</a:t>
+            </a:r>
+            <a:r>
+              <a:rPr lang="en-US" dirty="0"/>
+              <a:t>)</a:t>
+            </a:r>
+          </a:p>
+          <a:p>
+            <a:r>
+              <a:rPr lang="en-US" dirty="0"/>
+              <a:t>Federated Learning is widely used in Google Keyboard (</a:t>
+            </a:r>
+            <a:r>
+              <a:rPr lang="en-US" dirty="0" err="1"/>
+              <a:t>Gboard</a:t>
+            </a:r>
+            <a:r>
+              <a:rPr lang="en-US" dirty="0"/>
+              <a:t>)</a:t>
+            </a:r>
+          </a:p>
+          <a:p>
+            <a:r>
+              <a:rPr lang="en-US" dirty="0"/>
+              <a:t>Enhances typing suggestions and predictions</a:t>
+            </a:r>
+          </a:p>
+          <a:p>
+            <a:r>
+              <a:rPr lang="en-US" dirty="0"/>
+              <a:t>Learns from user behavior while preserving privacy</a:t>
+            </a:r>
           </a:p>
         </p:txBody>
       </p:sp>
     </p:spTree>
+    <p:extLst>
+      <p:ext uri="{BB962C8B-B14F-4D97-AF65-F5344CB8AC3E}">
+        <p14:creationId xmlns:p14="http://schemas.microsoft.com/office/powerpoint/2010/main" val="2709091811"/>
+      </p:ext>
+    </p:extLst>
   </p:cSld>
   <p:clrMapOvr>
     <a:masterClrMapping/>
@@ -4553,8 +4554,12 @@
           <a:lstStyle/>
           <a:p>
             <a:r>
-              <a:rPr lang="en-US" dirty="0"/>
-              <a:t>Advantages of Federated Learning</a:t>
+              <a:rPr lang="en-US" dirty="0" err="1"/>
+              <a:t>Gboard</a:t>
+            </a:r>
+            <a:r>
+              <a:rPr lang="en-US" dirty="0"/>
+              <a:t> – Data Collection</a:t>
             </a:r>
           </a:p>
         </p:txBody>
@@ -4575,58 +4580,40 @@
           <a:lstStyle/>
           <a:p>
             <a:r>
-              <a:rPr lang="en-US" dirty="0"/>
-              <a:t>Scalability</a:t>
+              <a:rPr lang="en-US" dirty="0" err="1"/>
+              <a:t>Gboard</a:t>
+            </a:r>
+            <a:r>
+              <a:rPr lang="en-US" dirty="0"/>
+              <a:t> collects user data </a:t>
             </a:r>
           </a:p>
           <a:p>
             <a:pPr lvl="1"/>
             <a:r>
               <a:rPr lang="en-US" dirty="0"/>
-              <a:t>Scales with big, distributed datasets across multiple devices.</a:t>
-            </a:r>
-          </a:p>
-          <a:p>
-            <a:r>
-              <a:rPr lang="en-US" dirty="0"/>
-              <a:t>Better Model Performance</a:t>
+              <a:t>Search history</a:t>
             </a:r>
           </a:p>
           <a:p>
             <a:pPr lvl="1"/>
             <a:r>
               <a:rPr lang="en-US" dirty="0"/>
-              <a:t>Uses heterogeneous data from various devices to improve model accuracy.</a:t>
-            </a:r>
-          </a:p>
-          <a:p>
-            <a:r>
-              <a:rPr lang="en-US" dirty="0"/>
-              <a:t>Real-time Updates</a:t>
-            </a:r>
-          </a:p>
-          <a:p>
-            <a:pPr lvl="1"/>
-            <a:r>
-              <a:rPr lang="en-US" dirty="0"/>
-              <a:t>Allows real-time model updates on each device.</a:t>
-            </a:r>
-          </a:p>
-          <a:p>
-            <a:endParaRPr lang="en-US" dirty="0"/>
-          </a:p>
-          <a:p>
-            <a:endParaRPr lang="en-US" dirty="0"/>
-          </a:p>
-          <a:p>
-            <a:endParaRPr lang="en-US" dirty="0"/>
+              <a:t>Typing patterns</a:t>
+            </a:r>
+          </a:p>
+          <a:p>
+            <a:r>
+              <a:rPr lang="en-US" dirty="0"/>
+              <a:t>Data remains stored on the user’s device</a:t>
+            </a:r>
           </a:p>
         </p:txBody>
       </p:sp>
     </p:spTree>
     <p:extLst>
       <p:ext uri="{BB962C8B-B14F-4D97-AF65-F5344CB8AC3E}">
-        <p14:creationId xmlns:p14="http://schemas.microsoft.com/office/powerpoint/2010/main" val="3155556318"/>
+        <p14:creationId xmlns:p14="http://schemas.microsoft.com/office/powerpoint/2010/main" val="1203170958"/>
       </p:ext>
     </p:extLst>
   </p:cSld>
@@ -4718,6 +4705,12 @@
           <a:p>
             <a:r>
               <a:rPr lang="en-US" dirty="0"/>
+              <a:t>Application of Federated Learning</a:t>
+            </a:r>
+          </a:p>
+          <a:p>
+            <a:r>
+              <a:rPr lang="en-US" dirty="0"/>
               <a:t>Advantages of Federated Learning </a:t>
             </a:r>
           </a:p>
@@ -4770,13 +4763,201 @@
         <p:spPr/>
         <p:txBody>
           <a:bodyPr>
+            <a:normAutofit/>
+          </a:bodyPr>
+          <a:lstStyle/>
+          <a:p>
+            <a:r>
+              <a:rPr lang="en-US" dirty="0" err="1"/>
+              <a:t>Gboard</a:t>
+            </a:r>
+            <a:r>
+              <a:rPr lang="en-US" dirty="0"/>
+              <a:t> – Model Training</a:t>
+            </a:r>
+          </a:p>
+        </p:txBody>
+      </p:sp>
+      <p:sp>
+        <p:nvSpPr>
+          <p:cNvPr id="4" name="Content Placeholder 3"/>
+          <p:cNvSpPr>
+            <a:spLocks noGrp="1"/>
+          </p:cNvSpPr>
+          <p:nvPr>
+            <p:ph idx="1"/>
+          </p:nvPr>
+        </p:nvSpPr>
+        <p:spPr/>
+        <p:txBody>
+          <a:bodyPr/>
+          <a:lstStyle/>
+          <a:p>
+            <a:r>
+              <a:rPr lang="en-US" dirty="0"/>
+              <a:t>Model is trained locally using the local data</a:t>
+            </a:r>
+          </a:p>
+          <a:p>
+            <a:r>
+              <a:rPr lang="en-US" dirty="0"/>
+              <a:t>No raw data is sent to a central server</a:t>
+            </a:r>
+          </a:p>
+        </p:txBody>
+      </p:sp>
+    </p:spTree>
+    <p:extLst>
+      <p:ext uri="{BB962C8B-B14F-4D97-AF65-F5344CB8AC3E}">
+        <p14:creationId xmlns:p14="http://schemas.microsoft.com/office/powerpoint/2010/main" val="3299092740"/>
+      </p:ext>
+    </p:extLst>
+  </p:cSld>
+  <p:clrMapOvr>
+    <a:masterClrMapping/>
+  </p:clrMapOvr>
+</p:sld>
+</file>
+
+<file path=ppt/slides/slide21.xml><?xml version="1.0" encoding="utf-8"?>
+<p:sld xmlns:a="http://schemas.openxmlformats.org/drawingml/2006/main" xmlns:r="http://schemas.openxmlformats.org/officeDocument/2006/relationships" xmlns:p="http://schemas.openxmlformats.org/presentationml/2006/main">
+  <p:cSld>
+    <p:spTree>
+      <p:nvGrpSpPr>
+        <p:cNvPr id="1" name=""/>
+        <p:cNvGrpSpPr/>
+        <p:nvPr/>
+      </p:nvGrpSpPr>
+      <p:grpSpPr>
+        <a:xfrm>
+          <a:off x="0" y="0"/>
+          <a:ext cx="0" cy="0"/>
+          <a:chOff x="0" y="0"/>
+          <a:chExt cx="0" cy="0"/>
+        </a:xfrm>
+      </p:grpSpPr>
+      <p:sp>
+        <p:nvSpPr>
+          <p:cNvPr id="2" name="Title 1"/>
+          <p:cNvSpPr>
+            <a:spLocks noGrp="1"/>
+          </p:cNvSpPr>
+          <p:nvPr>
+            <p:ph type="title"/>
+          </p:nvPr>
+        </p:nvSpPr>
+        <p:spPr/>
+        <p:txBody>
+          <a:bodyPr>
+            <a:normAutofit/>
+          </a:bodyPr>
+          <a:lstStyle/>
+          <a:p>
+            <a:r>
+              <a:rPr lang="en-US" dirty="0" err="1"/>
+              <a:t>Gboard</a:t>
+            </a:r>
+            <a:r>
+              <a:rPr lang="en-US" dirty="0"/>
+              <a:t> – Model Updates</a:t>
+            </a:r>
+          </a:p>
+        </p:txBody>
+      </p:sp>
+      <p:sp>
+        <p:nvSpPr>
+          <p:cNvPr id="4" name="Content Placeholder 3"/>
+          <p:cNvSpPr>
+            <a:spLocks noGrp="1"/>
+          </p:cNvSpPr>
+          <p:nvPr>
+            <p:ph idx="1"/>
+          </p:nvPr>
+        </p:nvSpPr>
+        <p:spPr/>
+        <p:txBody>
+          <a:bodyPr/>
+          <a:lstStyle/>
+          <a:p>
+            <a:r>
+              <a:rPr lang="en-US" dirty="0"/>
+              <a:t>Local model updates are generated on the device</a:t>
+            </a:r>
+          </a:p>
+          <a:p>
+            <a:r>
+              <a:rPr lang="en-US" dirty="0"/>
+              <a:t>Updates are encrypted and sent to a central server</a:t>
+            </a:r>
+          </a:p>
+          <a:p>
+            <a:r>
+              <a:rPr lang="en-US" dirty="0"/>
+              <a:t>Server aggregates updates from multiple users</a:t>
+            </a:r>
+          </a:p>
+          <a:p>
+            <a:r>
+              <a:rPr lang="en-US" dirty="0"/>
+              <a:t>Builds an improved global model</a:t>
+            </a:r>
+          </a:p>
+        </p:txBody>
+      </p:sp>
+    </p:spTree>
+    <p:extLst>
+      <p:ext uri="{BB962C8B-B14F-4D97-AF65-F5344CB8AC3E}">
+        <p14:creationId xmlns:p14="http://schemas.microsoft.com/office/powerpoint/2010/main" val="1407412668"/>
+      </p:ext>
+    </p:extLst>
+  </p:cSld>
+  <p:clrMapOvr>
+    <a:masterClrMapping/>
+  </p:clrMapOvr>
+</p:sld>
+</file>
+
+<file path=ppt/slides/slide22.xml><?xml version="1.0" encoding="utf-8"?>
+<p:sld xmlns:a="http://schemas.openxmlformats.org/drawingml/2006/main" xmlns:r="http://schemas.openxmlformats.org/officeDocument/2006/relationships" xmlns:p="http://schemas.openxmlformats.org/presentationml/2006/main">
+  <p:cSld>
+    <p:spTree>
+      <p:nvGrpSpPr>
+        <p:cNvPr id="1" name=""/>
+        <p:cNvGrpSpPr/>
+        <p:nvPr/>
+      </p:nvGrpSpPr>
+      <p:grpSpPr>
+        <a:xfrm>
+          <a:off x="0" y="0"/>
+          <a:ext cx="0" cy="0"/>
+          <a:chOff x="0" y="0"/>
+          <a:chExt cx="0" cy="0"/>
+        </a:xfrm>
+      </p:grpSpPr>
+      <p:sp>
+        <p:nvSpPr>
+          <p:cNvPr id="2" name="Title 1"/>
+          <p:cNvSpPr>
+            <a:spLocks noGrp="1"/>
+          </p:cNvSpPr>
+          <p:nvPr>
+            <p:ph type="title"/>
+          </p:nvPr>
+        </p:nvSpPr>
+        <p:spPr/>
+        <p:txBody>
+          <a:bodyPr>
             <a:normAutofit fontScale="90000"/>
           </a:bodyPr>
           <a:lstStyle/>
           <a:p>
             <a:r>
-              <a:rPr lang="en-US" dirty="0"/>
-              <a:t>Disadvantages of Federated Learning</a:t>
+              <a:rPr lang="en-US" dirty="0" err="1"/>
+              <a:t>Gboard</a:t>
+            </a:r>
+            <a:r>
+              <a:rPr lang="en-US" dirty="0"/>
+              <a:t> – Improved User Experience</a:t>
             </a:r>
           </a:p>
         </p:txBody>
@@ -4793,48 +4974,249 @@
         </p:nvSpPr>
         <p:spPr/>
         <p:txBody>
+          <a:bodyPr/>
+          <a:lstStyle/>
+          <a:p>
+            <a:r>
+              <a:rPr lang="en-US" dirty="0"/>
+              <a:t>Model continuously improves with more updates</a:t>
+            </a:r>
+          </a:p>
+          <a:p>
+            <a:r>
+              <a:rPr lang="en-US" dirty="0"/>
+              <a:t>Provides better typing predictions</a:t>
+            </a:r>
+          </a:p>
+          <a:p>
+            <a:r>
+              <a:rPr lang="en-US" dirty="0"/>
+              <a:t>Suggests more accurate words and phrases</a:t>
+            </a:r>
+          </a:p>
+          <a:p>
+            <a:r>
+              <a:rPr lang="en-US" dirty="0"/>
+              <a:t>Adapts to individual user behavior</a:t>
+            </a:r>
+          </a:p>
+        </p:txBody>
+      </p:sp>
+    </p:spTree>
+    <p:extLst>
+      <p:ext uri="{BB962C8B-B14F-4D97-AF65-F5344CB8AC3E}">
+        <p14:creationId xmlns:p14="http://schemas.microsoft.com/office/powerpoint/2010/main" val="3972574001"/>
+      </p:ext>
+    </p:extLst>
+  </p:cSld>
+  <p:clrMapOvr>
+    <a:masterClrMapping/>
+  </p:clrMapOvr>
+</p:sld>
+</file>
+
+<file path=ppt/slides/slide23.xml><?xml version="1.0" encoding="utf-8"?>
+<p:sld xmlns:a="http://schemas.openxmlformats.org/drawingml/2006/main" xmlns:r="http://schemas.openxmlformats.org/officeDocument/2006/relationships" xmlns:p="http://schemas.openxmlformats.org/presentationml/2006/main">
+  <p:cSld>
+    <p:spTree>
+      <p:nvGrpSpPr>
+        <p:cNvPr id="1" name=""/>
+        <p:cNvGrpSpPr/>
+        <p:nvPr/>
+      </p:nvGrpSpPr>
+      <p:grpSpPr>
+        <a:xfrm>
+          <a:off x="0" y="0"/>
+          <a:ext cx="0" cy="0"/>
+          <a:chOff x="0" y="0"/>
+          <a:chExt cx="0" cy="0"/>
+        </a:xfrm>
+      </p:grpSpPr>
+      <p:sp>
+        <p:nvSpPr>
+          <p:cNvPr id="2" name="Title 1"/>
+          <p:cNvSpPr>
+            <a:spLocks noGrp="1"/>
+          </p:cNvSpPr>
+          <p:nvPr>
+            <p:ph type="title"/>
+          </p:nvPr>
+        </p:nvSpPr>
+        <p:spPr/>
+        <p:txBody>
           <a:bodyPr>
-            <a:normAutofit fontScale="92500" lnSpcReduction="20000"/>
+            <a:normAutofit/>
           </a:bodyPr>
           <a:lstStyle/>
           <a:p>
             <a:r>
-              <a:rPr lang="en-US" dirty="0"/>
-              <a:t>Network Latency</a:t>
+              <a:rPr lang="en-US" dirty="0" err="1"/>
+              <a:t>Gboard</a:t>
+            </a:r>
+            <a:r>
+              <a:rPr lang="en-US" dirty="0"/>
+              <a:t> – Privacy and Efficiency</a:t>
+            </a:r>
+          </a:p>
+        </p:txBody>
+      </p:sp>
+      <p:sp>
+        <p:nvSpPr>
+          <p:cNvPr id="4" name="Content Placeholder 3"/>
+          <p:cNvSpPr>
+            <a:spLocks noGrp="1"/>
+          </p:cNvSpPr>
+          <p:nvPr>
+            <p:ph idx="1"/>
+          </p:nvPr>
+        </p:nvSpPr>
+        <p:spPr/>
+        <p:txBody>
+          <a:bodyPr/>
+          <a:lstStyle/>
+          <a:p>
+            <a:r>
+              <a:rPr lang="en-US" dirty="0"/>
+              <a:t>Personal data never leaves the device</a:t>
+            </a:r>
+          </a:p>
+          <a:p>
+            <a:r>
+              <a:rPr lang="en-US" dirty="0"/>
+              <a:t>Only model updates are shared</a:t>
+            </a:r>
+          </a:p>
+          <a:p>
+            <a:r>
+              <a:rPr lang="en-US" dirty="0"/>
+              <a:t>Reduces bandwidth usage</a:t>
+            </a:r>
+          </a:p>
+          <a:p>
+            <a:r>
+              <a:rPr lang="en-US" dirty="0"/>
+              <a:t>Ensures efficient and scalable learning</a:t>
+            </a:r>
+          </a:p>
+        </p:txBody>
+      </p:sp>
+    </p:spTree>
+    <p:extLst>
+      <p:ext uri="{BB962C8B-B14F-4D97-AF65-F5344CB8AC3E}">
+        <p14:creationId xmlns:p14="http://schemas.microsoft.com/office/powerpoint/2010/main" val="591355216"/>
+      </p:ext>
+    </p:extLst>
+  </p:cSld>
+  <p:clrMapOvr>
+    <a:masterClrMapping/>
+  </p:clrMapOvr>
+</p:sld>
+</file>
+
+<file path=ppt/slides/slide24.xml><?xml version="1.0" encoding="utf-8"?>
+<p:sld xmlns:a="http://schemas.openxmlformats.org/drawingml/2006/main" xmlns:r="http://schemas.openxmlformats.org/officeDocument/2006/relationships" xmlns:p="http://schemas.openxmlformats.org/presentationml/2006/main">
+  <p:cSld>
+    <p:spTree>
+      <p:nvGrpSpPr>
+        <p:cNvPr id="1" name=""/>
+        <p:cNvGrpSpPr/>
+        <p:nvPr/>
+      </p:nvGrpSpPr>
+      <p:grpSpPr>
+        <a:xfrm>
+          <a:off x="0" y="0"/>
+          <a:ext cx="0" cy="0"/>
+          <a:chOff x="0" y="0"/>
+          <a:chExt cx="0" cy="0"/>
+        </a:xfrm>
+      </p:grpSpPr>
+      <p:sp>
+        <p:nvSpPr>
+          <p:cNvPr id="2" name="Title 1"/>
+          <p:cNvSpPr>
+            <a:spLocks noGrp="1"/>
+          </p:cNvSpPr>
+          <p:nvPr>
+            <p:ph type="title"/>
+          </p:nvPr>
+        </p:nvSpPr>
+        <p:spPr/>
+        <p:txBody>
+          <a:bodyPr>
+            <a:normAutofit/>
+          </a:bodyPr>
+          <a:lstStyle/>
+          <a:p>
+            <a:r>
+              <a:rPr lang="en-US" dirty="0"/>
+              <a:t>Advantages of Federated Learning</a:t>
+            </a:r>
+          </a:p>
+        </p:txBody>
+      </p:sp>
+      <p:sp>
+        <p:nvSpPr>
+          <p:cNvPr id="4" name="Content Placeholder 3"/>
+          <p:cNvSpPr>
+            <a:spLocks noGrp="1"/>
+          </p:cNvSpPr>
+          <p:nvPr>
+            <p:ph idx="1"/>
+          </p:nvPr>
+        </p:nvSpPr>
+        <p:spPr/>
+        <p:txBody>
+          <a:bodyPr>
+            <a:normAutofit lnSpcReduction="10000"/>
+          </a:bodyPr>
+          <a:lstStyle/>
+          <a:p>
+            <a:r>
+              <a:rPr lang="en-US" dirty="0"/>
+              <a:t>Reduced Power Usage</a:t>
             </a:r>
           </a:p>
           <a:p>
             <a:pPr lvl="1"/>
             <a:r>
               <a:rPr lang="en-US" dirty="0"/>
-              <a:t>The communication between the devices and the central server can be a bottleneck and may add latency to the training process.</a:t>
-            </a:r>
-          </a:p>
-          <a:p>
-            <a:r>
-              <a:rPr lang="en-US" dirty="0"/>
-              <a:t>Heterogeneous devices</a:t>
+              <a:t>Reduced data size means reduced computation time and hence less power usage.</a:t>
+            </a:r>
+          </a:p>
+          <a:p>
+            <a:r>
+              <a:rPr lang="en-US" dirty="0"/>
+              <a:t>Guarantees Privacy</a:t>
             </a:r>
           </a:p>
           <a:p>
             <a:pPr lvl="1"/>
             <a:r>
               <a:rPr lang="en-US" dirty="0"/>
-              <a:t>The devices can be heterogeneous in terms of hardware and software, which can make it difficult to ensure the compatibility and consistency of the models.</a:t>
-            </a:r>
-          </a:p>
-          <a:p>
-            <a:r>
-              <a:rPr lang="en-US" dirty="0"/>
-              <a:t>Data Quality</a:t>
+              <a:t>Data stays on the device, maintaining privacy without loss of training.</a:t>
+            </a:r>
+          </a:p>
+          <a:p>
+            <a:r>
+              <a:rPr lang="en-US" dirty="0"/>
+              <a:t>No Device Performance Impact</a:t>
             </a:r>
           </a:p>
           <a:p>
             <a:pPr lvl="1"/>
             <a:r>
               <a:rPr lang="en-US" dirty="0"/>
-              <a:t>The quality of data can vary across the devices, which can lead to poor model performance.</a:t>
-            </a:r>
+              <a:t>Training is done only when the device is in idle or charging state, hence no impact on performance.</a:t>
+            </a:r>
+          </a:p>
+          <a:p>
+            <a:endParaRPr lang="en-US" dirty="0"/>
+          </a:p>
+          <a:p>
+            <a:endParaRPr lang="en-US" dirty="0"/>
+          </a:p>
+          <a:p>
+            <a:endParaRPr lang="en-US" dirty="0"/>
           </a:p>
         </p:txBody>
       </p:sp>
@@ -4846,7 +5228,231 @@
 </p:sld>
 </file>
 
-<file path=ppt/slides/slide21.xml><?xml version="1.0" encoding="utf-8"?>
+<file path=ppt/slides/slide25.xml><?xml version="1.0" encoding="utf-8"?>
+<p:sld xmlns:a="http://schemas.openxmlformats.org/drawingml/2006/main" xmlns:r="http://schemas.openxmlformats.org/officeDocument/2006/relationships" xmlns:p="http://schemas.openxmlformats.org/presentationml/2006/main">
+  <p:cSld>
+    <p:spTree>
+      <p:nvGrpSpPr>
+        <p:cNvPr id="1" name=""/>
+        <p:cNvGrpSpPr/>
+        <p:nvPr/>
+      </p:nvGrpSpPr>
+      <p:grpSpPr>
+        <a:xfrm>
+          <a:off x="0" y="0"/>
+          <a:ext cx="0" cy="0"/>
+          <a:chOff x="0" y="0"/>
+          <a:chExt cx="0" cy="0"/>
+        </a:xfrm>
+      </p:grpSpPr>
+      <p:sp>
+        <p:nvSpPr>
+          <p:cNvPr id="2" name="Title 1"/>
+          <p:cNvSpPr>
+            <a:spLocks noGrp="1"/>
+          </p:cNvSpPr>
+          <p:nvPr>
+            <p:ph type="title"/>
+          </p:nvPr>
+        </p:nvSpPr>
+        <p:spPr/>
+        <p:txBody>
+          <a:bodyPr>
+            <a:normAutofit/>
+          </a:bodyPr>
+          <a:lstStyle/>
+          <a:p>
+            <a:r>
+              <a:rPr lang="en-US" dirty="0"/>
+              <a:t>Advantages of Federated Learning</a:t>
+            </a:r>
+          </a:p>
+        </p:txBody>
+      </p:sp>
+      <p:sp>
+        <p:nvSpPr>
+          <p:cNvPr id="4" name="Content Placeholder 3"/>
+          <p:cNvSpPr>
+            <a:spLocks noGrp="1"/>
+          </p:cNvSpPr>
+          <p:nvPr>
+            <p:ph idx="1"/>
+          </p:nvPr>
+        </p:nvSpPr>
+        <p:spPr/>
+        <p:txBody>
+          <a:bodyPr/>
+          <a:lstStyle/>
+          <a:p>
+            <a:r>
+              <a:rPr lang="en-US" dirty="0"/>
+              <a:t>Scalability</a:t>
+            </a:r>
+          </a:p>
+          <a:p>
+            <a:pPr lvl="1"/>
+            <a:r>
+              <a:rPr lang="en-US" dirty="0"/>
+              <a:t>Scales with big, distributed datasets across multiple devices.</a:t>
+            </a:r>
+          </a:p>
+          <a:p>
+            <a:r>
+              <a:rPr lang="en-US" dirty="0"/>
+              <a:t>Better Model Performance</a:t>
+            </a:r>
+          </a:p>
+          <a:p>
+            <a:pPr lvl="1"/>
+            <a:r>
+              <a:rPr lang="en-US" dirty="0"/>
+              <a:t>Uses heterogeneous data from various devices to improve model accuracy.</a:t>
+            </a:r>
+          </a:p>
+          <a:p>
+            <a:r>
+              <a:rPr lang="en-US" dirty="0"/>
+              <a:t>Real-time Updates</a:t>
+            </a:r>
+          </a:p>
+          <a:p>
+            <a:pPr lvl="1"/>
+            <a:r>
+              <a:rPr lang="en-US" dirty="0"/>
+              <a:t>Allows real-time model updates on each device.</a:t>
+            </a:r>
+          </a:p>
+          <a:p>
+            <a:endParaRPr lang="en-US" dirty="0"/>
+          </a:p>
+          <a:p>
+            <a:endParaRPr lang="en-US" dirty="0"/>
+          </a:p>
+          <a:p>
+            <a:endParaRPr lang="en-US" dirty="0"/>
+          </a:p>
+        </p:txBody>
+      </p:sp>
+    </p:spTree>
+    <p:extLst>
+      <p:ext uri="{BB962C8B-B14F-4D97-AF65-F5344CB8AC3E}">
+        <p14:creationId xmlns:p14="http://schemas.microsoft.com/office/powerpoint/2010/main" val="3155556318"/>
+      </p:ext>
+    </p:extLst>
+  </p:cSld>
+  <p:clrMapOvr>
+    <a:masterClrMapping/>
+  </p:clrMapOvr>
+</p:sld>
+</file>
+
+<file path=ppt/slides/slide26.xml><?xml version="1.0" encoding="utf-8"?>
+<p:sld xmlns:a="http://schemas.openxmlformats.org/drawingml/2006/main" xmlns:r="http://schemas.openxmlformats.org/officeDocument/2006/relationships" xmlns:p="http://schemas.openxmlformats.org/presentationml/2006/main">
+  <p:cSld>
+    <p:spTree>
+      <p:nvGrpSpPr>
+        <p:cNvPr id="1" name=""/>
+        <p:cNvGrpSpPr/>
+        <p:nvPr/>
+      </p:nvGrpSpPr>
+      <p:grpSpPr>
+        <a:xfrm>
+          <a:off x="0" y="0"/>
+          <a:ext cx="0" cy="0"/>
+          <a:chOff x="0" y="0"/>
+          <a:chExt cx="0" cy="0"/>
+        </a:xfrm>
+      </p:grpSpPr>
+      <p:sp>
+        <p:nvSpPr>
+          <p:cNvPr id="2" name="Title 1"/>
+          <p:cNvSpPr>
+            <a:spLocks noGrp="1"/>
+          </p:cNvSpPr>
+          <p:nvPr>
+            <p:ph type="title"/>
+          </p:nvPr>
+        </p:nvSpPr>
+        <p:spPr/>
+        <p:txBody>
+          <a:bodyPr>
+            <a:normAutofit fontScale="90000"/>
+          </a:bodyPr>
+          <a:lstStyle/>
+          <a:p>
+            <a:r>
+              <a:rPr lang="en-US" dirty="0"/>
+              <a:t>Disadvantages of Federated Learning</a:t>
+            </a:r>
+          </a:p>
+        </p:txBody>
+      </p:sp>
+      <p:sp>
+        <p:nvSpPr>
+          <p:cNvPr id="4" name="Content Placeholder 3"/>
+          <p:cNvSpPr>
+            <a:spLocks noGrp="1"/>
+          </p:cNvSpPr>
+          <p:nvPr>
+            <p:ph idx="1"/>
+          </p:nvPr>
+        </p:nvSpPr>
+        <p:spPr/>
+        <p:txBody>
+          <a:bodyPr>
+            <a:normAutofit fontScale="92500" lnSpcReduction="20000"/>
+          </a:bodyPr>
+          <a:lstStyle/>
+          <a:p>
+            <a:r>
+              <a:rPr lang="en-US" dirty="0"/>
+              <a:t>Network Latency</a:t>
+            </a:r>
+          </a:p>
+          <a:p>
+            <a:pPr lvl="1"/>
+            <a:r>
+              <a:rPr lang="en-US" dirty="0"/>
+              <a:t>The communication between the devices and the central server can be a bottleneck and may add latency to the training process.</a:t>
+            </a:r>
+          </a:p>
+          <a:p>
+            <a:r>
+              <a:rPr lang="en-US" dirty="0"/>
+              <a:t>Heterogeneous devices</a:t>
+            </a:r>
+          </a:p>
+          <a:p>
+            <a:pPr lvl="1"/>
+            <a:r>
+              <a:rPr lang="en-US" dirty="0"/>
+              <a:t>The devices can be heterogeneous in terms of hardware and software, which can make it difficult to ensure the compatibility and consistency of the models.</a:t>
+            </a:r>
+          </a:p>
+          <a:p>
+            <a:r>
+              <a:rPr lang="en-US" dirty="0"/>
+              <a:t>Data Quality</a:t>
+            </a:r>
+          </a:p>
+          <a:p>
+            <a:pPr lvl="1"/>
+            <a:r>
+              <a:rPr lang="en-US" dirty="0"/>
+              <a:t>The quality of data can vary across the devices, which can lead to poor model performance.</a:t>
+            </a:r>
+          </a:p>
+        </p:txBody>
+      </p:sp>
+    </p:spTree>
+  </p:cSld>
+  <p:clrMapOvr>
+    <a:masterClrMapping/>
+  </p:clrMapOvr>
+</p:sld>
+</file>
+
+<file path=ppt/slides/slide27.xml><?xml version="1.0" encoding="utf-8"?>
 <p:sld xmlns:a="http://schemas.openxmlformats.org/drawingml/2006/main" xmlns:r="http://schemas.openxmlformats.org/officeDocument/2006/relationships" xmlns:p="http://schemas.openxmlformats.org/presentationml/2006/main">
   <p:cSld>
     <p:spTree>
